--- a/presentation/loop_unrolling_presentation.pptx
+++ b/presentation/loop_unrolling_presentation.pptx
@@ -5,22 +5,21 @@
     <p:sldMasterId id="2147483648" r:id="rId1"/>
   </p:sldMasterIdLst>
   <p:notesMasterIdLst>
-    <p:notesMasterId r:id="rId15"/>
+    <p:notesMasterId r:id="rId14"/>
   </p:notesMasterIdLst>
   <p:sldIdLst>
     <p:sldId id="256" r:id="rId2"/>
     <p:sldId id="258" r:id="rId3"/>
     <p:sldId id="259" r:id="rId4"/>
-    <p:sldId id="257" r:id="rId5"/>
-    <p:sldId id="261" r:id="rId6"/>
-    <p:sldId id="262" r:id="rId7"/>
-    <p:sldId id="263" r:id="rId8"/>
-    <p:sldId id="264" r:id="rId9"/>
-    <p:sldId id="265" r:id="rId10"/>
-    <p:sldId id="266" r:id="rId11"/>
-    <p:sldId id="267" r:id="rId12"/>
-    <p:sldId id="268" r:id="rId13"/>
-    <p:sldId id="269" r:id="rId14"/>
+    <p:sldId id="261" r:id="rId5"/>
+    <p:sldId id="262" r:id="rId6"/>
+    <p:sldId id="263" r:id="rId7"/>
+    <p:sldId id="264" r:id="rId8"/>
+    <p:sldId id="265" r:id="rId9"/>
+    <p:sldId id="266" r:id="rId10"/>
+    <p:sldId id="267" r:id="rId11"/>
+    <p:sldId id="268" r:id="rId12"/>
+    <p:sldId id="269" r:id="rId13"/>
   </p:sldIdLst>
   <p:sldSz cx="12192000" cy="6858000"/>
   <p:notesSz cx="6858000" cy="12192000"/>
@@ -1711,7 +1710,7 @@
           <a:p>
             <a:r>
               <a:rPr lang="en-US" dirty="0"/>
-              <a:t>Use this slide to bridge visuals to resource numbers. It also answers why a visually simpler circuit can be more resource-expensive.</a:t>
+              <a:t>This slide is the conclusion before the conclusion. Pause here and connect directly back to the research question.</a:t>
             </a:r>
           </a:p>
         </p:txBody>
@@ -1798,7 +1797,7 @@
           <a:p>
             <a:r>
               <a:rPr lang="en-US" dirty="0"/>
-              <a:t>This slide is the conclusion before the conclusion. Pause here and connect directly back to the research question.</a:t>
+              <a:t>End by saying your experiment confirms the paper’s main idea: maximum unroll is not automatically optimal. The right factor is timing/resource-aware.</a:t>
             </a:r>
           </a:p>
         </p:txBody>
@@ -1885,7 +1884,7 @@
           <a:p>
             <a:r>
               <a:rPr lang="en-US" dirty="0"/>
-              <a:t>End by saying your experiment confirms the paper’s main idea: maximum unroll is not automatically optimal. The right factor is timing/resource-aware.</a:t>
+              <a:t>Mention that the main scientific argument is centered on Kurra et al.; tool references support the implementation section.</a:t>
             </a:r>
           </a:p>
         </p:txBody>
@@ -1908,93 +1907,6 @@
             <a:fld id="{F7021451-1387-4CA6-816F-3879F97B5CBC}" type="slidenum">
               <a:rPr lang="en-US"/>
               <a:t>12</a:t>
-            </a:fld>
-            <a:endParaRPr lang="en-US"/>
-          </a:p>
-        </p:txBody>
-      </p:sp>
-    </p:spTree>
-    <p:extLst>
-      <p:ext uri="{BB962C8B-B14F-4D97-AF65-F5344CB8AC3E}">
-        <p14:creationId xmlns:p14="http://schemas.microsoft.com/office/powerpoint/2010/main" val="1024086991"/>
-      </p:ext>
-    </p:extLst>
-  </p:cSld>
-  <p:clrMapOvr>
-    <a:masterClrMapping/>
-  </p:clrMapOvr>
-</p:notes>
-</file>
-
-<file path=ppt/notesSlides/notesSlide13.xml><?xml version="1.0" encoding="utf-8"?>
-<p:notes xmlns:a="http://schemas.openxmlformats.org/drawingml/2006/main" xmlns:r="http://schemas.openxmlformats.org/officeDocument/2006/relationships" xmlns:p="http://schemas.openxmlformats.org/presentationml/2006/main">
-  <p:cSld>
-    <p:spTree>
-      <p:nvGrpSpPr>
-        <p:cNvPr id="1" name=""/>
-        <p:cNvGrpSpPr/>
-        <p:nvPr/>
-      </p:nvGrpSpPr>
-      <p:grpSpPr>
-        <a:xfrm>
-          <a:off x="0" y="0"/>
-          <a:ext cx="0" cy="0"/>
-          <a:chOff x="0" y="0"/>
-          <a:chExt cx="0" cy="0"/>
-        </a:xfrm>
-      </p:grpSpPr>
-      <p:sp>
-        <p:nvSpPr>
-          <p:cNvPr id="2" name="Slide Image Placeholder 1"/>
-          <p:cNvSpPr>
-            <a:spLocks noGrp="1" noRot="1" noChangeAspect="1"/>
-          </p:cNvSpPr>
-          <p:nvPr>
-            <p:ph type="sldImg"/>
-          </p:nvPr>
-        </p:nvSpPr>
-        <p:spPr/>
-      </p:sp>
-      <p:sp>
-        <p:nvSpPr>
-          <p:cNvPr id="3" name="Notes Placeholder 2"/>
-          <p:cNvSpPr>
-            <a:spLocks noGrp="1"/>
-          </p:cNvSpPr>
-          <p:nvPr>
-            <p:ph type="body" idx="1"/>
-          </p:nvPr>
-        </p:nvSpPr>
-        <p:spPr/>
-        <p:txBody>
-          <a:bodyPr/>
-          <a:lstStyle/>
-          <a:p>
-            <a:r>
-              <a:rPr lang="en-US" dirty="0"/>
-              <a:t>Mention that the main scientific argument is centered on Kurra et al.; tool references support the implementation section.</a:t>
-            </a:r>
-          </a:p>
-        </p:txBody>
-      </p:sp>
-      <p:sp>
-        <p:nvSpPr>
-          <p:cNvPr id="4" name="Slide Number Placeholder 3"/>
-          <p:cNvSpPr>
-            <a:spLocks noGrp="1"/>
-          </p:cNvSpPr>
-          <p:nvPr>
-            <p:ph type="sldNum" sz="quarter" idx="10"/>
-          </p:nvPr>
-        </p:nvSpPr>
-        <p:spPr/>
-        <p:txBody>
-          <a:bodyPr/>
-          <a:lstStyle/>
-          <a:p>
-            <a:fld id="{F7021451-1387-4CA6-816F-3879F97B5CBC}" type="slidenum">
-              <a:rPr lang="en-US"/>
-              <a:t>13</a:t>
             </a:fld>
             <a:endParaRPr lang="en-US"/>
           </a:p>
@@ -2233,7 +2145,7 @@
           <a:p>
             <a:r>
               <a:rPr lang="en-US" dirty="0"/>
-              <a:t>This is the first thing missing from the proposed outline: a clear research question/motivation. It frames the rest of the deck and makes the presentation more scientific.</a:t>
+              <a:t>This slide connects your experiment back to the assigned paper. The implementation measures resources and timing as indirect evidence because modern HLS tools may not isolate pure controller delay.</a:t>
             </a:r>
           </a:p>
         </p:txBody>
@@ -2320,7 +2232,7 @@
           <a:p>
             <a:r>
               <a:rPr lang="en-US" dirty="0"/>
-              <a:t>This slide connects your experiment back to the assigned paper. The implementation measures resources and timing as indirect evidence because modern HLS tools may not isolate pure controller delay.</a:t>
+              <a:t>This is your own prototype. Emphasize that you used C simulation for correctness first, then C synthesis reports for latency/resources/timing.</a:t>
             </a:r>
           </a:p>
         </p:txBody>
@@ -2407,7 +2319,7 @@
           <a:p>
             <a:r>
               <a:rPr lang="en-US" dirty="0"/>
-              <a:t>This is your own prototype. Emphasize that you used C simulation for correctness first, then C synthesis reports for latency/resources/timing.</a:t>
+              <a:t>Explain II: initiation interval, how often a new loop iteration can start. The result shows that more unrolling is not always faster if II increases.</a:t>
             </a:r>
           </a:p>
         </p:txBody>
@@ -2494,7 +2406,7 @@
           <a:p>
             <a:r>
               <a:rPr lang="en-US" dirty="0"/>
-              <a:t>Explain II: initiation interval, how often a new loop iteration can start. The result shows that more unrolling is not always faster if II increases.</a:t>
+              <a:t>Explain that partitioning x and z breaks the memory bottleneck, allowing II to stay low and more DSPs to be used. But resources grow heavily.</a:t>
             </a:r>
           </a:p>
         </p:txBody>
@@ -2581,7 +2493,7 @@
           <a:p>
             <a:r>
               <a:rPr lang="en-US" dirty="0"/>
-              <a:t>Explain that partitioning x and z breaks the memory bottleneck, allowing II to stay low and more DSPs to be used. But resources grow heavily.</a:t>
+              <a:t>This slide lets you answer direct questions about numbers. Mention that the normal memory rows demonstrate the bottleneck; partitioned rows show what happens when the bottleneck is reduced.</a:t>
             </a:r>
           </a:p>
         </p:txBody>
@@ -2668,7 +2580,7 @@
           <a:p>
             <a:r>
               <a:rPr lang="en-US" dirty="0"/>
-              <a:t>This slide lets you answer direct questions about numbers. Mention that the normal memory rows demonstrate the bottleneck; partitioned rows show what happens when the bottleneck is reduced.</a:t>
+              <a:t>Use this slide to bridge visuals to resource numbers. It also answers why a visually simpler circuit can be more resource-expensive.</a:t>
             </a:r>
           </a:p>
         </p:txBody>
@@ -2853,7 +2765,7 @@
           </a:prstGeom>
           <a:extLst>
             <a:ext uri="{C572A759-6A51-4108-AA02-DFA0A04FC94B}">
-              <ma14:wrappingTextBoxFlag xmlns="" xmlns:ma14="http://schemas.microsoft.com/office/mac/drawingml/2011/main" val="0"/>
+              <ma14:wrappingTextBoxFlag xmlns:ma14="http://schemas.microsoft.com/office/mac/drawingml/2011/main" xmlns="" val="0"/>
             </a:ext>
           </a:extLst>
         </p:spPr>
@@ -2931,7 +2843,7 @@
           </a:prstGeom>
           <a:extLst>
             <a:ext uri="{C572A759-6A51-4108-AA02-DFA0A04FC94B}">
-              <ma14:wrappingTextBoxFlag xmlns="" xmlns:ma14="http://schemas.microsoft.com/office/mac/drawingml/2011/main" val="0"/>
+              <ma14:wrappingTextBoxFlag xmlns:ma14="http://schemas.microsoft.com/office/mac/drawingml/2011/main" xmlns="" val="0"/>
             </a:ext>
           </a:extLst>
         </p:spPr>
@@ -3698,7 +3610,7 @@
           </a:prstGeom>
           <a:extLst>
             <a:ext uri="{C572A759-6A51-4108-AA02-DFA0A04FC94B}">
-              <ma14:wrappingTextBoxFlag xmlns="" xmlns:ma14="http://schemas.microsoft.com/office/mac/drawingml/2011/main" val="0"/>
+              <ma14:wrappingTextBoxFlag xmlns:ma14="http://schemas.microsoft.com/office/mac/drawingml/2011/main" xmlns="" val="0"/>
             </a:ext>
           </a:extLst>
         </p:spPr>
@@ -3764,480 +3676,6 @@
 </file>
 
 <file path=ppt/slides/slide10.xml><?xml version="1.0" encoding="utf-8"?>
-<p:sld xmlns:a="http://schemas.openxmlformats.org/drawingml/2006/main" xmlns:r="http://schemas.openxmlformats.org/officeDocument/2006/relationships" xmlns:p="http://schemas.openxmlformats.org/presentationml/2006/main">
-  <p:cSld name="Slide 11">
-    <p:spTree>
-      <p:nvGrpSpPr>
-        <p:cNvPr id="1" name=""/>
-        <p:cNvGrpSpPr/>
-        <p:nvPr/>
-      </p:nvGrpSpPr>
-      <p:grpSpPr>
-        <a:xfrm>
-          <a:off x="0" y="0"/>
-          <a:ext cx="0" cy="0"/>
-          <a:chOff x="0" y="0"/>
-          <a:chExt cx="0" cy="0"/>
-        </a:xfrm>
-      </p:grpSpPr>
-      <p:sp>
-        <p:nvSpPr>
-          <p:cNvPr id="2" name="Text 0"/>
-          <p:cNvSpPr/>
-          <p:nvPr/>
-        </p:nvSpPr>
-        <p:spPr>
-          <a:xfrm>
-            <a:off x="502920" y="320040"/>
-            <a:ext cx="11064240" cy="438912"/>
-          </a:xfrm>
-          <a:prstGeom prst="rect">
-            <a:avLst/>
-          </a:prstGeom>
-          <a:noFill/>
-          <a:ln/>
-        </p:spPr>
-        <p:txBody>
-          <a:bodyPr wrap="square" lIns="0" tIns="0" rIns="0" bIns="0" rtlCol="0" anchor="ctr"/>
-          <a:lstStyle/>
-          <a:p>
-            <a:pPr marL="0" indent="0">
-              <a:buNone/>
-            </a:pPr>
-            <a:r>
-              <a:rPr lang="en-US" sz="3400" b="1" dirty="0">
-                <a:solidFill>
-                  <a:srgbClr val="102033"/>
-                </a:solidFill>
-                <a:latin typeface="Aptos Display" pitchFamily="34" charset="0"/>
-                <a:ea typeface="Aptos Display" pitchFamily="34" charset="-122"/>
-                <a:cs typeface="Aptos Display" pitchFamily="34" charset="-120"/>
-              </a:rPr>
-              <a:t>RTL visualization: what unrolling becomes</a:t>
-            </a:r>
-            <a:endParaRPr lang="en-US" sz="3400" dirty="0"/>
-          </a:p>
-        </p:txBody>
-      </p:sp>
-      <p:sp>
-        <p:nvSpPr>
-          <p:cNvPr id="3" name="Text 1"/>
-          <p:cNvSpPr/>
-          <p:nvPr/>
-        </p:nvSpPr>
-        <p:spPr>
-          <a:xfrm>
-            <a:off x="530352" y="822960"/>
-            <a:ext cx="10424160" cy="256032"/>
-          </a:xfrm>
-          <a:prstGeom prst="rect">
-            <a:avLst/>
-          </a:prstGeom>
-          <a:noFill/>
-          <a:ln/>
-        </p:spPr>
-        <p:txBody>
-          <a:bodyPr wrap="square" lIns="0" tIns="0" rIns="0" bIns="0" rtlCol="0" anchor="ctr"/>
-          <a:lstStyle/>
-          <a:p>
-            <a:pPr marL="0" indent="0">
-              <a:buNone/>
-            </a:pPr>
-            <a:r>
-              <a:rPr lang="en-US" sz="1450" dirty="0">
-                <a:solidFill>
-                  <a:srgbClr val="5B677A"/>
-                </a:solidFill>
-              </a:rPr>
-              <a:t>Vivado schematics illustrate the structural growth.</a:t>
-            </a:r>
-            <a:endParaRPr lang="en-US" sz="1450" dirty="0"/>
-          </a:p>
-        </p:txBody>
-      </p:sp>
-      <p:pic>
-        <p:nvPicPr>
-          <p:cNvPr id="4" name="Image 0" descr="/mnt/data/vivado_rtl_schematic_rolled_single_multiplier_fsm.png"/>
-          <p:cNvPicPr>
-            <a:picLocks noChangeAspect="1"/>
-          </p:cNvPicPr>
-          <p:nvPr/>
-        </p:nvPicPr>
-        <p:blipFill>
-          <a:blip r:embed="rId3"/>
-          <a:stretch>
-            <a:fillRect/>
-          </a:stretch>
-        </p:blipFill>
-        <p:spPr>
-          <a:xfrm>
-            <a:off x="502920" y="1405993"/>
-            <a:ext cx="3611880" cy="1531413"/>
-          </a:xfrm>
-          <a:prstGeom prst="rect">
-            <a:avLst/>
-          </a:prstGeom>
-        </p:spPr>
-      </p:pic>
-      <p:pic>
-        <p:nvPicPr>
-          <p:cNvPr id="5" name="Image 1" descr="/mnt/data/vivado_rtl_schematic_unrolled_factor_4_adder_tree.png"/>
-          <p:cNvPicPr>
-            <a:picLocks noChangeAspect="1"/>
-          </p:cNvPicPr>
-          <p:nvPr/>
-        </p:nvPicPr>
-        <p:blipFill>
-          <a:blip r:embed="rId4"/>
-          <a:stretch>
-            <a:fillRect/>
-          </a:stretch>
-        </p:blipFill>
-        <p:spPr>
-          <a:xfrm>
-            <a:off x="4279392" y="1385263"/>
-            <a:ext cx="3566160" cy="1572874"/>
-          </a:xfrm>
-          <a:prstGeom prst="rect">
-            <a:avLst/>
-          </a:prstGeom>
-        </p:spPr>
-      </p:pic>
-      <p:pic>
-        <p:nvPicPr>
-          <p:cNvPr id="6" name="Image 2" descr="/mnt/data/vivado_rtl_schematic_unrolled_factor_8_adder_tree.png"/>
-          <p:cNvPicPr>
-            <a:picLocks noChangeAspect="1"/>
-          </p:cNvPicPr>
-          <p:nvPr/>
-        </p:nvPicPr>
-        <p:blipFill>
-          <a:blip r:embed="rId5"/>
-          <a:stretch>
-            <a:fillRect/>
-          </a:stretch>
-        </p:blipFill>
-        <p:spPr>
-          <a:xfrm>
-            <a:off x="8001000" y="1261860"/>
-            <a:ext cx="3611880" cy="1819679"/>
-          </a:xfrm>
-          <a:prstGeom prst="rect">
-            <a:avLst/>
-          </a:prstGeom>
-        </p:spPr>
-      </p:pic>
-      <p:sp>
-        <p:nvSpPr>
-          <p:cNvPr id="7" name="Text 2"/>
-          <p:cNvSpPr/>
-          <p:nvPr/>
-        </p:nvSpPr>
-        <p:spPr>
-          <a:xfrm>
-            <a:off x="502920" y="3383280"/>
-            <a:ext cx="3611880" cy="274320"/>
-          </a:xfrm>
-          <a:prstGeom prst="rect">
-            <a:avLst/>
-          </a:prstGeom>
-          <a:noFill/>
-          <a:ln/>
-        </p:spPr>
-        <p:txBody>
-          <a:bodyPr wrap="square" lIns="0" tIns="0" rIns="0" bIns="0" rtlCol="0" anchor="ctr"/>
-          <a:lstStyle/>
-          <a:p>
-            <a:pPr marL="0" indent="0" algn="ctr">
-              <a:buNone/>
-            </a:pPr>
-            <a:r>
-              <a:rPr lang="en-US" sz="2000" b="1" dirty="0">
-                <a:solidFill>
-                  <a:srgbClr val="102033"/>
-                </a:solidFill>
-              </a:rPr>
-              <a:t>Rolled</a:t>
-            </a:r>
-            <a:endParaRPr lang="en-US" sz="2000" dirty="0"/>
-          </a:p>
-        </p:txBody>
-      </p:sp>
-      <p:sp>
-        <p:nvSpPr>
-          <p:cNvPr id="8" name="Text 3"/>
-          <p:cNvSpPr/>
-          <p:nvPr/>
-        </p:nvSpPr>
-        <p:spPr>
-          <a:xfrm>
-            <a:off x="502920" y="3730752"/>
-            <a:ext cx="3611880" cy="274320"/>
-          </a:xfrm>
-          <a:prstGeom prst="rect">
-            <a:avLst/>
-          </a:prstGeom>
-          <a:noFill/>
-          <a:ln/>
-        </p:spPr>
-        <p:txBody>
-          <a:bodyPr wrap="square" lIns="0" tIns="0" rIns="0" bIns="0" rtlCol="0" anchor="ctr"/>
-          <a:lstStyle/>
-          <a:p>
-            <a:pPr marL="0" indent="0" algn="ctr">
-              <a:buNone/>
-            </a:pPr>
-            <a:r>
-              <a:rPr lang="en-US" sz="1600" dirty="0">
-                <a:solidFill>
-                  <a:srgbClr val="5B677A"/>
-                </a:solidFill>
-              </a:rPr>
-              <a:t>1 multiplier + FSM</a:t>
-            </a:r>
-            <a:endParaRPr lang="en-US" sz="1600" dirty="0"/>
-          </a:p>
-        </p:txBody>
-      </p:sp>
-      <p:sp>
-        <p:nvSpPr>
-          <p:cNvPr id="9" name="Text 4"/>
-          <p:cNvSpPr/>
-          <p:nvPr/>
-        </p:nvSpPr>
-        <p:spPr>
-          <a:xfrm>
-            <a:off x="4279392" y="3383280"/>
-            <a:ext cx="3566160" cy="274320"/>
-          </a:xfrm>
-          <a:prstGeom prst="rect">
-            <a:avLst/>
-          </a:prstGeom>
-          <a:noFill/>
-          <a:ln/>
-        </p:spPr>
-        <p:txBody>
-          <a:bodyPr wrap="square" lIns="0" tIns="0" rIns="0" bIns="0" rtlCol="0" anchor="ctr"/>
-          <a:lstStyle/>
-          <a:p>
-            <a:pPr marL="0" indent="0" algn="ctr">
-              <a:buNone/>
-            </a:pPr>
-            <a:r>
-              <a:rPr lang="en-US" sz="2000" b="1" dirty="0">
-                <a:solidFill>
-                  <a:srgbClr val="102033"/>
-                </a:solidFill>
-              </a:rPr>
-              <a:t>Unroll factor 4</a:t>
-            </a:r>
-            <a:endParaRPr lang="en-US" sz="2000" dirty="0"/>
-          </a:p>
-        </p:txBody>
-      </p:sp>
-      <p:sp>
-        <p:nvSpPr>
-          <p:cNvPr id="10" name="Text 5"/>
-          <p:cNvSpPr/>
-          <p:nvPr/>
-        </p:nvSpPr>
-        <p:spPr>
-          <a:xfrm>
-            <a:off x="4279392" y="3730752"/>
-            <a:ext cx="3566160" cy="274320"/>
-          </a:xfrm>
-          <a:prstGeom prst="rect">
-            <a:avLst/>
-          </a:prstGeom>
-          <a:noFill/>
-          <a:ln/>
-        </p:spPr>
-        <p:txBody>
-          <a:bodyPr wrap="square" lIns="0" tIns="0" rIns="0" bIns="0" rtlCol="0" anchor="ctr"/>
-          <a:lstStyle/>
-          <a:p>
-            <a:pPr marL="0" indent="0" algn="ctr">
-              <a:buNone/>
-            </a:pPr>
-            <a:r>
-              <a:rPr lang="en-US" sz="1600" dirty="0">
-                <a:solidFill>
-                  <a:srgbClr val="5B677A"/>
-                </a:solidFill>
-              </a:rPr>
-              <a:t>4 multipliers + adder tree</a:t>
-            </a:r>
-            <a:endParaRPr lang="en-US" sz="1600" dirty="0"/>
-          </a:p>
-        </p:txBody>
-      </p:sp>
-      <p:sp>
-        <p:nvSpPr>
-          <p:cNvPr id="11" name="Text 6"/>
-          <p:cNvSpPr/>
-          <p:nvPr/>
-        </p:nvSpPr>
-        <p:spPr>
-          <a:xfrm>
-            <a:off x="8001000" y="3383280"/>
-            <a:ext cx="3611880" cy="274320"/>
-          </a:xfrm>
-          <a:prstGeom prst="rect">
-            <a:avLst/>
-          </a:prstGeom>
-          <a:noFill/>
-          <a:ln/>
-        </p:spPr>
-        <p:txBody>
-          <a:bodyPr wrap="square" lIns="0" tIns="0" rIns="0" bIns="0" rtlCol="0" anchor="ctr"/>
-          <a:lstStyle/>
-          <a:p>
-            <a:pPr marL="0" indent="0" algn="ctr">
-              <a:buNone/>
-            </a:pPr>
-            <a:r>
-              <a:rPr lang="en-US" sz="2000" b="1" dirty="0">
-                <a:solidFill>
-                  <a:srgbClr val="102033"/>
-                </a:solidFill>
-              </a:rPr>
-              <a:t>Unroll factor 8</a:t>
-            </a:r>
-            <a:endParaRPr lang="en-US" sz="2000" dirty="0"/>
-          </a:p>
-        </p:txBody>
-      </p:sp>
-      <p:sp>
-        <p:nvSpPr>
-          <p:cNvPr id="12" name="Text 7"/>
-          <p:cNvSpPr/>
-          <p:nvPr/>
-        </p:nvSpPr>
-        <p:spPr>
-          <a:xfrm>
-            <a:off x="8001000" y="3730752"/>
-            <a:ext cx="3611880" cy="274320"/>
-          </a:xfrm>
-          <a:prstGeom prst="rect">
-            <a:avLst/>
-          </a:prstGeom>
-          <a:noFill/>
-          <a:ln/>
-        </p:spPr>
-        <p:txBody>
-          <a:bodyPr wrap="square" lIns="0" tIns="0" rIns="0" bIns="0" rtlCol="0" anchor="ctr"/>
-          <a:lstStyle/>
-          <a:p>
-            <a:pPr marL="0" indent="0" algn="ctr">
-              <a:buNone/>
-            </a:pPr>
-            <a:r>
-              <a:rPr lang="en-US" sz="1600" dirty="0">
-                <a:solidFill>
-                  <a:srgbClr val="5B677A"/>
-                </a:solidFill>
-              </a:rPr>
-              <a:t>8 multipliers + larger tree</a:t>
-            </a:r>
-            <a:endParaRPr lang="en-US" sz="1600" dirty="0"/>
-          </a:p>
-        </p:txBody>
-      </p:sp>
-      <p:sp>
-        <p:nvSpPr>
-          <p:cNvPr id="13" name="Text 8"/>
-          <p:cNvSpPr/>
-          <p:nvPr/>
-        </p:nvSpPr>
-        <p:spPr>
-          <a:xfrm>
-            <a:off x="914400" y="4800600"/>
-            <a:ext cx="10241280" cy="594360"/>
-          </a:xfrm>
-          <a:prstGeom prst="rect">
-            <a:avLst/>
-          </a:prstGeom>
-          <a:noFill/>
-          <a:ln/>
-        </p:spPr>
-        <p:txBody>
-          <a:bodyPr wrap="square" lIns="635" tIns="635" rIns="635" bIns="635" rtlCol="0" anchor="ctr">
-            <a:normAutofit lnSpcReduction="10000"/>
-          </a:bodyPr>
-          <a:lstStyle/>
-          <a:p>
-            <a:pPr marL="0" indent="0" algn="ctr">
-              <a:buNone/>
-            </a:pPr>
-            <a:r>
-              <a:rPr lang="en-US" sz="1950" dirty="0">
-                <a:solidFill>
-                  <a:srgbClr val="102033"/>
-                </a:solidFill>
-              </a:rPr>
-              <a:t>The rolled schematic looks more complex because of control, but it reuses less arithmetic hardware. The unrolled schematics look cleaner but duplicate hardware.</a:t>
-            </a:r>
-            <a:endParaRPr lang="en-US" sz="1950" dirty="0"/>
-          </a:p>
-        </p:txBody>
-      </p:sp>
-      <p:sp>
-        <p:nvSpPr>
-          <p:cNvPr id="25" name="Slide Number Placeholder 0"/>
-          <p:cNvSpPr>
-            <a:spLocks noGrp="1"/>
-          </p:cNvSpPr>
-          <p:nvPr>
-            <p:ph type="sldNum" sz="quarter" idx="4294967295"/>
-          </p:nvPr>
-        </p:nvSpPr>
-        <p:spPr>
-          <a:xfrm>
-            <a:off x="11384280" y="6565392"/>
-            <a:ext cx="800000" cy="300000"/>
-          </a:xfrm>
-          <a:prstGeom prst="rect">
-            <a:avLst/>
-          </a:prstGeom>
-          <a:extLst>
-            <a:ext uri="{C572A759-6A51-4108-AA02-DFA0A04FC94B}">
-              <ma14:wrappingTextBoxFlag xmlns="" xmlns:ma14="http://schemas.microsoft.com/office/mac/drawingml/2011/main" val="0"/>
-            </a:ext>
-          </a:extLst>
-        </p:spPr>
-        <p:txBody>
-          <a:bodyPr/>
-          <a:lstStyle>
-            <a:lvl1pPr>
-              <a:defRPr sz="900">
-                <a:solidFill>
-                  <a:srgbClr val="5B677A"/>
-                </a:solidFill>
-                <a:latin typeface="Aptos"/>
-                <a:ea typeface="Aptos"/>
-                <a:cs typeface="Aptos"/>
-              </a:defRPr>
-            </a:lvl1pPr>
-          </a:lstStyle>
-          <a:p>
-            <a:pPr algn="l"/>
-            <a:fld id="{F7021451-1387-4CA6-816F-3879F97B5CBC}" type="slidenum">
-              <a:rPr lang="en-US" b="0"/>
-              <a:t>10</a:t>
-            </a:fld>
-            <a:endParaRPr lang="en-US"/>
-          </a:p>
-        </p:txBody>
-      </p:sp>
-    </p:spTree>
-  </p:cSld>
-  <p:clrMapOvr>
-    <a:masterClrMapping/>
-  </p:clrMapOvr>
-</p:sld>
-</file>
-
-<file path=ppt/slides/slide11.xml><?xml version="1.0" encoding="utf-8"?>
 <p:sld xmlns:a="http://schemas.openxmlformats.org/drawingml/2006/main" xmlns:r="http://schemas.openxmlformats.org/officeDocument/2006/relationships" xmlns:p="http://schemas.openxmlformats.org/presentationml/2006/main">
   <p:cSld name="Slide 12">
     <p:spTree>
@@ -4617,7 +4055,7 @@
           </a:prstGeom>
           <a:extLst>
             <a:ext uri="{C572A759-6A51-4108-AA02-DFA0A04FC94B}">
-              <ma14:wrappingTextBoxFlag xmlns="" xmlns:ma14="http://schemas.microsoft.com/office/mac/drawingml/2011/main" val="0"/>
+              <ma14:wrappingTextBoxFlag xmlns:ma14="http://schemas.microsoft.com/office/mac/drawingml/2011/main" xmlns="" val="0"/>
             </a:ext>
           </a:extLst>
         </p:spPr>
@@ -4639,7 +4077,7 @@
             <a:pPr algn="l"/>
             <a:fld id="{F7021451-1387-4CA6-816F-3879F97B5CBC}" type="slidenum">
               <a:rPr lang="en-US" b="0"/>
-              <a:t>11</a:t>
+              <a:t>10</a:t>
             </a:fld>
             <a:endParaRPr lang="en-US"/>
           </a:p>
@@ -4653,7 +4091,7 @@
 </p:sld>
 </file>
 
-<file path=ppt/slides/slide12.xml><?xml version="1.0" encoding="utf-8"?>
+<file path=ppt/slides/slide11.xml><?xml version="1.0" encoding="utf-8"?>
 <p:sld xmlns:a="http://schemas.openxmlformats.org/drawingml/2006/main" xmlns:r="http://schemas.openxmlformats.org/officeDocument/2006/relationships" xmlns:p="http://schemas.openxmlformats.org/presentationml/2006/main">
   <p:cSld name="Slide 13">
     <p:spTree>
@@ -5191,7 +4629,7 @@
           </a:prstGeom>
           <a:extLst>
             <a:ext uri="{C572A759-6A51-4108-AA02-DFA0A04FC94B}">
-              <ma14:wrappingTextBoxFlag xmlns="" xmlns:ma14="http://schemas.microsoft.com/office/mac/drawingml/2011/main" val="0"/>
+              <ma14:wrappingTextBoxFlag xmlns:ma14="http://schemas.microsoft.com/office/mac/drawingml/2011/main" xmlns="" val="0"/>
             </a:ext>
           </a:extLst>
         </p:spPr>
@@ -5213,7 +4651,7 @@
             <a:pPr algn="l"/>
             <a:fld id="{F7021451-1387-4CA6-816F-3879F97B5CBC}" type="slidenum">
               <a:rPr lang="en-US" b="0"/>
-              <a:t>12</a:t>
+              <a:t>11</a:t>
             </a:fld>
             <a:endParaRPr lang="en-US"/>
           </a:p>
@@ -5227,7 +4665,7 @@
 </p:sld>
 </file>
 
-<file path=ppt/slides/slide13.xml><?xml version="1.0" encoding="utf-8"?>
+<file path=ppt/slides/slide12.xml><?xml version="1.0" encoding="utf-8"?>
 <p:sld xmlns:a="http://schemas.openxmlformats.org/drawingml/2006/main" xmlns:r="http://schemas.openxmlformats.org/officeDocument/2006/relationships" xmlns:p="http://schemas.openxmlformats.org/presentationml/2006/main">
   <p:cSld name="Slide 14">
     <p:spTree>
@@ -5440,7 +4878,7 @@
           </a:prstGeom>
           <a:extLst>
             <a:ext uri="{C572A759-6A51-4108-AA02-DFA0A04FC94B}">
-              <ma14:wrappingTextBoxFlag xmlns="" xmlns:ma14="http://schemas.microsoft.com/office/mac/drawingml/2011/main" val="0"/>
+              <ma14:wrappingTextBoxFlag xmlns:ma14="http://schemas.microsoft.com/office/mac/drawingml/2011/main" xmlns="" val="0"/>
             </a:ext>
           </a:extLst>
         </p:spPr>
@@ -5462,7 +4900,7 @@
             <a:pPr algn="l"/>
             <a:fld id="{F7021451-1387-4CA6-816F-3879F97B5CBC}" type="slidenum">
               <a:rPr lang="en-US" b="0"/>
-              <a:t>13</a:t>
+              <a:t>12</a:t>
             </a:fld>
             <a:endParaRPr lang="en-US"/>
           </a:p>
@@ -6036,7 +5474,7 @@
           </a:prstGeom>
           <a:extLst>
             <a:ext uri="{C572A759-6A51-4108-AA02-DFA0A04FC94B}">
-              <ma14:wrappingTextBoxFlag xmlns="" xmlns:ma14="http://schemas.microsoft.com/office/mac/drawingml/2011/main" val="0"/>
+              <ma14:wrappingTextBoxFlag xmlns:ma14="http://schemas.microsoft.com/office/mac/drawingml/2011/main" xmlns="" val="0"/>
             </a:ext>
           </a:extLst>
         </p:spPr>
@@ -6560,7 +5998,7 @@
           </a:prstGeom>
           <a:extLst>
             <a:ext uri="{C572A759-6A51-4108-AA02-DFA0A04FC94B}">
-              <ma14:wrappingTextBoxFlag xmlns="" xmlns:ma14="http://schemas.microsoft.com/office/mac/drawingml/2011/main" val="0"/>
+              <ma14:wrappingTextBoxFlag xmlns:ma14="http://schemas.microsoft.com/office/mac/drawingml/2011/main" xmlns="" val="0"/>
             </a:ext>
           </a:extLst>
         </p:spPr>
@@ -6659,601 +6097,6 @@
 </file>
 
 <file path=ppt/slides/slide4.xml><?xml version="1.0" encoding="utf-8"?>
-<p:sld xmlns:a="http://schemas.openxmlformats.org/drawingml/2006/main" xmlns:r="http://schemas.openxmlformats.org/officeDocument/2006/relationships" xmlns:p="http://schemas.openxmlformats.org/presentationml/2006/main">
-  <p:cSld name="Slide 2">
-    <p:spTree>
-      <p:nvGrpSpPr>
-        <p:cNvPr id="1" name=""/>
-        <p:cNvGrpSpPr/>
-        <p:nvPr/>
-      </p:nvGrpSpPr>
-      <p:grpSpPr>
-        <a:xfrm>
-          <a:off x="0" y="0"/>
-          <a:ext cx="0" cy="0"/>
-          <a:chOff x="0" y="0"/>
-          <a:chExt cx="0" cy="0"/>
-        </a:xfrm>
-      </p:grpSpPr>
-      <p:sp>
-        <p:nvSpPr>
-          <p:cNvPr id="2" name="Text 0"/>
-          <p:cNvSpPr/>
-          <p:nvPr/>
-        </p:nvSpPr>
-        <p:spPr>
-          <a:xfrm>
-            <a:off x="502920" y="320040"/>
-            <a:ext cx="11064240" cy="438912"/>
-          </a:xfrm>
-          <a:prstGeom prst="rect">
-            <a:avLst/>
-          </a:prstGeom>
-          <a:noFill/>
-          <a:ln/>
-        </p:spPr>
-        <p:txBody>
-          <a:bodyPr wrap="square" lIns="0" tIns="0" rIns="0" bIns="0" rtlCol="0" anchor="ctr"/>
-          <a:lstStyle/>
-          <a:p>
-            <a:pPr marL="0" indent="0">
-              <a:buNone/>
-            </a:pPr>
-            <a:r>
-              <a:rPr lang="en-US" sz="3400" b="1" dirty="0">
-                <a:solidFill>
-                  <a:srgbClr val="102033"/>
-                </a:solidFill>
-                <a:latin typeface="Aptos Display" pitchFamily="34" charset="0"/>
-                <a:ea typeface="Aptos Display" pitchFamily="34" charset="-122"/>
-                <a:cs typeface="Aptos Display" pitchFamily="34" charset="-120"/>
-              </a:rPr>
-              <a:t>Why this topic matters</a:t>
-            </a:r>
-            <a:endParaRPr lang="en-US" sz="3400" dirty="0"/>
-          </a:p>
-        </p:txBody>
-      </p:sp>
-      <p:sp>
-        <p:nvSpPr>
-          <p:cNvPr id="3" name="Text 1"/>
-          <p:cNvSpPr/>
-          <p:nvPr/>
-        </p:nvSpPr>
-        <p:spPr>
-          <a:xfrm>
-            <a:off x="530352" y="822960"/>
-            <a:ext cx="10424160" cy="256032"/>
-          </a:xfrm>
-          <a:prstGeom prst="rect">
-            <a:avLst/>
-          </a:prstGeom>
-          <a:noFill/>
-          <a:ln/>
-        </p:spPr>
-        <p:txBody>
-          <a:bodyPr wrap="square" lIns="0" tIns="0" rIns="0" bIns="0" rtlCol="0" anchor="ctr"/>
-          <a:lstStyle/>
-          <a:p>
-            <a:pPr marL="0" indent="0">
-              <a:buNone/>
-            </a:pPr>
-            <a:r>
-              <a:rPr lang="en-US" sz="1450" dirty="0">
-                <a:solidFill>
-                  <a:srgbClr val="5B677A"/>
-                </a:solidFill>
-              </a:rPr>
-              <a:t>The missing slide in the outline: the problem/research question.</a:t>
-            </a:r>
-            <a:endParaRPr lang="en-US" sz="1450" dirty="0"/>
-          </a:p>
-        </p:txBody>
-      </p:sp>
-      <p:sp>
-        <p:nvSpPr>
-          <p:cNvPr id="4" name="Text 2"/>
-          <p:cNvSpPr/>
-          <p:nvPr/>
-        </p:nvSpPr>
-        <p:spPr>
-          <a:xfrm>
-            <a:off x="640080" y="1280160"/>
-            <a:ext cx="10424160" cy="411480"/>
-          </a:xfrm>
-          <a:prstGeom prst="rect">
-            <a:avLst/>
-          </a:prstGeom>
-          <a:noFill/>
-          <a:ln/>
-        </p:spPr>
-        <p:txBody>
-          <a:bodyPr wrap="square" lIns="0" tIns="0" rIns="0" bIns="0" rtlCol="0" anchor="ctr"/>
-          <a:lstStyle/>
-          <a:p>
-            <a:pPr marL="0" indent="0">
-              <a:buNone/>
-            </a:pPr>
-            <a:r>
-              <a:rPr lang="en-US" sz="2600" b="1" dirty="0">
-                <a:solidFill>
-                  <a:srgbClr val="102033"/>
-                </a:solidFill>
-              </a:rPr>
-              <a:t>In software, unrolling changes instructions. In HLS, unrolling changes hardware.</a:t>
-            </a:r>
-            <a:endParaRPr lang="en-US" sz="2600" dirty="0"/>
-          </a:p>
-        </p:txBody>
-      </p:sp>
-      <p:sp>
-        <p:nvSpPr>
-          <p:cNvPr id="5" name="Shape 3"/>
-          <p:cNvSpPr/>
-          <p:nvPr/>
-        </p:nvSpPr>
-        <p:spPr>
-          <a:xfrm>
-            <a:off x="685800" y="2148840"/>
-            <a:ext cx="2011680" cy="658368"/>
-          </a:xfrm>
-          <a:prstGeom prst="chevron">
-            <a:avLst/>
-          </a:prstGeom>
-          <a:solidFill>
-            <a:srgbClr val="1E6BFF"/>
-          </a:solidFill>
-          <a:ln w="12700">
-            <a:solidFill>
-              <a:srgbClr val="1E6BFF"/>
-            </a:solidFill>
-            <a:prstDash val="solid"/>
-          </a:ln>
-        </p:spPr>
-        <p:txBody>
-          <a:bodyPr/>
-          <a:lstStyle/>
-          <a:p>
-            <a:endParaRPr lang="en-GB"/>
-          </a:p>
-        </p:txBody>
-      </p:sp>
-      <p:sp>
-        <p:nvSpPr>
-          <p:cNvPr id="6" name="Text 4"/>
-          <p:cNvSpPr/>
-          <p:nvPr/>
-        </p:nvSpPr>
-        <p:spPr>
-          <a:xfrm>
-            <a:off x="731520" y="2359152"/>
-            <a:ext cx="1920240" cy="228600"/>
-          </a:xfrm>
-          <a:prstGeom prst="rect">
-            <a:avLst/>
-          </a:prstGeom>
-          <a:noFill/>
-          <a:ln/>
-        </p:spPr>
-        <p:txBody>
-          <a:bodyPr wrap="square" lIns="0" tIns="0" rIns="0" bIns="0" rtlCol="0" anchor="ctr"/>
-          <a:lstStyle/>
-          <a:p>
-            <a:pPr marL="0" indent="0" algn="ctr">
-              <a:buNone/>
-            </a:pPr>
-            <a:r>
-              <a:rPr lang="en-US" sz="1500" b="1" dirty="0">
-                <a:solidFill>
-                  <a:srgbClr val="FFFFFF"/>
-                </a:solidFill>
-              </a:rPr>
-              <a:t>C/C++ loop</a:t>
-            </a:r>
-            <a:endParaRPr lang="en-US" sz="1500" dirty="0"/>
-          </a:p>
-        </p:txBody>
-      </p:sp>
-      <p:sp>
-        <p:nvSpPr>
-          <p:cNvPr id="7" name="Shape 5"/>
-          <p:cNvSpPr/>
-          <p:nvPr/>
-        </p:nvSpPr>
-        <p:spPr>
-          <a:xfrm>
-            <a:off x="2907792" y="2148840"/>
-            <a:ext cx="2057400" cy="658368"/>
-          </a:xfrm>
-          <a:prstGeom prst="chevron">
-            <a:avLst/>
-          </a:prstGeom>
-          <a:solidFill>
-            <a:srgbClr val="20A39E"/>
-          </a:solidFill>
-          <a:ln w="12700">
-            <a:solidFill>
-              <a:srgbClr val="20A39E"/>
-            </a:solidFill>
-            <a:prstDash val="solid"/>
-          </a:ln>
-        </p:spPr>
-        <p:txBody>
-          <a:bodyPr/>
-          <a:lstStyle/>
-          <a:p>
-            <a:endParaRPr lang="en-GB"/>
-          </a:p>
-        </p:txBody>
-      </p:sp>
-      <p:sp>
-        <p:nvSpPr>
-          <p:cNvPr id="8" name="Text 6"/>
-          <p:cNvSpPr/>
-          <p:nvPr/>
-        </p:nvSpPr>
-        <p:spPr>
-          <a:xfrm>
-            <a:off x="2953512" y="2359152"/>
-            <a:ext cx="1965960" cy="228600"/>
-          </a:xfrm>
-          <a:prstGeom prst="rect">
-            <a:avLst/>
-          </a:prstGeom>
-          <a:noFill/>
-          <a:ln/>
-        </p:spPr>
-        <p:txBody>
-          <a:bodyPr wrap="square" lIns="0" tIns="0" rIns="0" bIns="0" rtlCol="0" anchor="ctr"/>
-          <a:lstStyle/>
-          <a:p>
-            <a:pPr marL="0" indent="0" algn="ctr">
-              <a:buNone/>
-            </a:pPr>
-            <a:r>
-              <a:rPr lang="en-US" sz="1500" b="1" dirty="0">
-                <a:solidFill>
-                  <a:srgbClr val="FFFFFF"/>
-                </a:solidFill>
-              </a:rPr>
-              <a:t>HLS schedule</a:t>
-            </a:r>
-            <a:endParaRPr lang="en-US" sz="1500" dirty="0"/>
-          </a:p>
-        </p:txBody>
-      </p:sp>
-      <p:sp>
-        <p:nvSpPr>
-          <p:cNvPr id="9" name="Shape 7"/>
-          <p:cNvSpPr/>
-          <p:nvPr/>
-        </p:nvSpPr>
-        <p:spPr>
-          <a:xfrm>
-            <a:off x="5184648" y="2148840"/>
-            <a:ext cx="2103120" cy="658368"/>
-          </a:xfrm>
-          <a:prstGeom prst="chevron">
-            <a:avLst/>
-          </a:prstGeom>
-          <a:solidFill>
-            <a:srgbClr val="F59E0B"/>
-          </a:solidFill>
-          <a:ln w="12700">
-            <a:solidFill>
-              <a:srgbClr val="F59E0B"/>
-            </a:solidFill>
-            <a:prstDash val="solid"/>
-          </a:ln>
-        </p:spPr>
-        <p:txBody>
-          <a:bodyPr/>
-          <a:lstStyle/>
-          <a:p>
-            <a:endParaRPr lang="en-GB"/>
-          </a:p>
-        </p:txBody>
-      </p:sp>
-      <p:sp>
-        <p:nvSpPr>
-          <p:cNvPr id="10" name="Text 8"/>
-          <p:cNvSpPr/>
-          <p:nvPr/>
-        </p:nvSpPr>
-        <p:spPr>
-          <a:xfrm>
-            <a:off x="5230368" y="2359152"/>
-            <a:ext cx="2011680" cy="228600"/>
-          </a:xfrm>
-          <a:prstGeom prst="rect">
-            <a:avLst/>
-          </a:prstGeom>
-          <a:noFill/>
-          <a:ln/>
-        </p:spPr>
-        <p:txBody>
-          <a:bodyPr wrap="square" lIns="0" tIns="0" rIns="0" bIns="0" rtlCol="0" anchor="ctr"/>
-          <a:lstStyle/>
-          <a:p>
-            <a:pPr marL="0" indent="0" algn="ctr">
-              <a:buNone/>
-            </a:pPr>
-            <a:r>
-              <a:rPr lang="en-US" sz="1500" b="1" dirty="0">
-                <a:solidFill>
-                  <a:srgbClr val="FFFFFF"/>
-                </a:solidFill>
-              </a:rPr>
-              <a:t>Datapath + FSM</a:t>
-            </a:r>
-            <a:endParaRPr lang="en-US" sz="1500" dirty="0"/>
-          </a:p>
-        </p:txBody>
-      </p:sp>
-      <p:sp>
-        <p:nvSpPr>
-          <p:cNvPr id="11" name="Shape 9"/>
-          <p:cNvSpPr/>
-          <p:nvPr/>
-        </p:nvSpPr>
-        <p:spPr>
-          <a:xfrm>
-            <a:off x="7543800" y="2148840"/>
-            <a:ext cx="2057400" cy="658368"/>
-          </a:xfrm>
-          <a:prstGeom prst="chevron">
-            <a:avLst/>
-          </a:prstGeom>
-          <a:solidFill>
-            <a:srgbClr val="6D5DD3"/>
-          </a:solidFill>
-          <a:ln w="12700">
-            <a:solidFill>
-              <a:srgbClr val="6D5DD3"/>
-            </a:solidFill>
-            <a:prstDash val="solid"/>
-          </a:ln>
-        </p:spPr>
-        <p:txBody>
-          <a:bodyPr/>
-          <a:lstStyle/>
-          <a:p>
-            <a:endParaRPr lang="en-GB"/>
-          </a:p>
-        </p:txBody>
-      </p:sp>
-      <p:sp>
-        <p:nvSpPr>
-          <p:cNvPr id="12" name="Text 10"/>
-          <p:cNvSpPr/>
-          <p:nvPr/>
-        </p:nvSpPr>
-        <p:spPr>
-          <a:xfrm>
-            <a:off x="7589520" y="2359152"/>
-            <a:ext cx="1965960" cy="228600"/>
-          </a:xfrm>
-          <a:prstGeom prst="rect">
-            <a:avLst/>
-          </a:prstGeom>
-          <a:noFill/>
-          <a:ln/>
-        </p:spPr>
-        <p:txBody>
-          <a:bodyPr wrap="square" lIns="0" tIns="0" rIns="0" bIns="0" rtlCol="0" anchor="ctr"/>
-          <a:lstStyle/>
-          <a:p>
-            <a:pPr marL="0" indent="0" algn="ctr">
-              <a:buNone/>
-            </a:pPr>
-            <a:r>
-              <a:rPr lang="en-US" sz="1500" b="1" dirty="0">
-                <a:solidFill>
-                  <a:srgbClr val="FFFFFF"/>
-                </a:solidFill>
-              </a:rPr>
-              <a:t>RTL reports</a:t>
-            </a:r>
-            <a:endParaRPr lang="en-US" sz="1500" dirty="0"/>
-          </a:p>
-        </p:txBody>
-      </p:sp>
-      <p:sp>
-        <p:nvSpPr>
-          <p:cNvPr id="13" name="Shape 11"/>
-          <p:cNvSpPr/>
-          <p:nvPr/>
-        </p:nvSpPr>
-        <p:spPr>
-          <a:xfrm>
-            <a:off x="1005840" y="3840480"/>
-            <a:ext cx="10149840" cy="1005840"/>
-          </a:xfrm>
-          <a:prstGeom prst="roundRect">
-            <a:avLst>
-              <a:gd name="adj" fmla="val 7273"/>
-            </a:avLst>
-          </a:prstGeom>
-          <a:solidFill>
-            <a:srgbClr val="E9F1FF"/>
-          </a:solidFill>
-          <a:ln w="12700">
-            <a:solidFill>
-              <a:srgbClr val="B9C9E6"/>
-            </a:solidFill>
-            <a:prstDash val="solid"/>
-          </a:ln>
-        </p:spPr>
-        <p:txBody>
-          <a:bodyPr/>
-          <a:lstStyle/>
-          <a:p>
-            <a:endParaRPr lang="en-GB"/>
-          </a:p>
-        </p:txBody>
-      </p:sp>
-      <p:sp>
-        <p:nvSpPr>
-          <p:cNvPr id="14" name="Text 12"/>
-          <p:cNvSpPr/>
-          <p:nvPr/>
-        </p:nvSpPr>
-        <p:spPr>
-          <a:xfrm>
-            <a:off x="1234440" y="4041648"/>
-            <a:ext cx="2011680" cy="228600"/>
-          </a:xfrm>
-          <a:prstGeom prst="rect">
-            <a:avLst/>
-          </a:prstGeom>
-          <a:noFill/>
-          <a:ln/>
-        </p:spPr>
-        <p:txBody>
-          <a:bodyPr wrap="square" lIns="0" tIns="0" rIns="0" bIns="0" rtlCol="0" anchor="ctr"/>
-          <a:lstStyle/>
-          <a:p>
-            <a:pPr marL="0" indent="0">
-              <a:buNone/>
-            </a:pPr>
-            <a:r>
-              <a:rPr lang="en-US" sz="1600" b="1" dirty="0">
-                <a:solidFill>
-                  <a:srgbClr val="1E6BFF"/>
-                </a:solidFill>
-              </a:rPr>
-              <a:t>Research question</a:t>
-            </a:r>
-            <a:endParaRPr lang="en-US" sz="1600" dirty="0"/>
-          </a:p>
-        </p:txBody>
-      </p:sp>
-      <p:sp>
-        <p:nvSpPr>
-          <p:cNvPr id="15" name="Text 13"/>
-          <p:cNvSpPr/>
-          <p:nvPr/>
-        </p:nvSpPr>
-        <p:spPr>
-          <a:xfrm>
-            <a:off x="3429000" y="3995928"/>
-            <a:ext cx="7269480" cy="320040"/>
-          </a:xfrm>
-          <a:prstGeom prst="rect">
-            <a:avLst/>
-          </a:prstGeom>
-          <a:noFill/>
-          <a:ln/>
-        </p:spPr>
-        <p:txBody>
-          <a:bodyPr wrap="square" lIns="0" tIns="0" rIns="0" bIns="0" rtlCol="0" anchor="ctr"/>
-          <a:lstStyle/>
-          <a:p>
-            <a:r>
-              <a:rPr lang="en-GB" sz="2100" b="1" dirty="0">
-                <a:solidFill>
-                  <a:srgbClr val="102033"/>
-                </a:solidFill>
-              </a:rPr>
-              <a:t>When does loop unrolling stop reducing latency and start increasing hardware/timing pressure?</a:t>
-            </a:r>
-            <a:endParaRPr lang="en-US" sz="2100" dirty="0"/>
-          </a:p>
-        </p:txBody>
-      </p:sp>
-      <p:sp>
-        <p:nvSpPr>
-          <p:cNvPr id="16" name="Text 14"/>
-          <p:cNvSpPr/>
-          <p:nvPr/>
-        </p:nvSpPr>
-        <p:spPr>
-          <a:xfrm>
-            <a:off x="1234440" y="4498848"/>
-            <a:ext cx="8961120" cy="228600"/>
-          </a:xfrm>
-          <a:prstGeom prst="rect">
-            <a:avLst/>
-          </a:prstGeom>
-          <a:noFill/>
-          <a:ln/>
-        </p:spPr>
-        <p:txBody>
-          <a:bodyPr wrap="square" lIns="0" tIns="0" rIns="0" bIns="0" rtlCol="0" anchor="ctr"/>
-          <a:lstStyle/>
-          <a:p>
-            <a:pPr marL="0" indent="0">
-              <a:buNone/>
-            </a:pPr>
-            <a:r>
-              <a:rPr lang="en-US" sz="1250" dirty="0">
-                <a:solidFill>
-                  <a:srgbClr val="5B677A"/>
-                </a:solidFill>
-              </a:rPr>
-              <a:t>Based on Kurra, Singh &amp; Panda, DATE 2007 — extended with a student Vitis HLS experiment.</a:t>
-            </a:r>
-            <a:endParaRPr lang="en-US" sz="1250" dirty="0"/>
-          </a:p>
-        </p:txBody>
-      </p:sp>
-      <p:sp>
-        <p:nvSpPr>
-          <p:cNvPr id="25" name="Slide Number Placeholder 0"/>
-          <p:cNvSpPr>
-            <a:spLocks noGrp="1"/>
-          </p:cNvSpPr>
-          <p:nvPr>
-            <p:ph type="sldNum" sz="quarter" idx="4294967295"/>
-          </p:nvPr>
-        </p:nvSpPr>
-        <p:spPr>
-          <a:xfrm>
-            <a:off x="11384280" y="6565392"/>
-            <a:ext cx="800000" cy="300000"/>
-          </a:xfrm>
-          <a:prstGeom prst="rect">
-            <a:avLst/>
-          </a:prstGeom>
-          <a:extLst>
-            <a:ext uri="{C572A759-6A51-4108-AA02-DFA0A04FC94B}">
-              <ma14:wrappingTextBoxFlag xmlns="" xmlns:ma14="http://schemas.microsoft.com/office/mac/drawingml/2011/main" val="0"/>
-            </a:ext>
-          </a:extLst>
-        </p:spPr>
-        <p:txBody>
-          <a:bodyPr/>
-          <a:lstStyle>
-            <a:lvl1pPr>
-              <a:defRPr sz="900">
-                <a:solidFill>
-                  <a:srgbClr val="5B677A"/>
-                </a:solidFill>
-                <a:latin typeface="Aptos"/>
-                <a:ea typeface="Aptos"/>
-                <a:cs typeface="Aptos"/>
-              </a:defRPr>
-            </a:lvl1pPr>
-          </a:lstStyle>
-          <a:p>
-            <a:pPr algn="l"/>
-            <a:fld id="{F7021451-1387-4CA6-816F-3879F97B5CBC}" type="slidenum">
-              <a:rPr lang="en-US" b="0"/>
-              <a:t>4</a:t>
-            </a:fld>
-            <a:endParaRPr lang="en-US"/>
-          </a:p>
-        </p:txBody>
-      </p:sp>
-    </p:spTree>
-  </p:cSld>
-  <p:clrMapOvr>
-    <a:masterClrMapping/>
-  </p:clrMapOvr>
-</p:sld>
-</file>
-
-<file path=ppt/slides/slide5.xml><?xml version="1.0" encoding="utf-8"?>
 <p:sld xmlns:a="http://schemas.openxmlformats.org/drawingml/2006/main" xmlns:r="http://schemas.openxmlformats.org/officeDocument/2006/relationships" xmlns:p="http://schemas.openxmlformats.org/presentationml/2006/main">
   <p:cSld name="Slide 6">
     <p:spTree>
@@ -7781,7 +6624,7 @@
           </a:prstGeom>
           <a:extLst>
             <a:ext uri="{C572A759-6A51-4108-AA02-DFA0A04FC94B}">
-              <ma14:wrappingTextBoxFlag xmlns="" xmlns:ma14="http://schemas.microsoft.com/office/mac/drawingml/2011/main" val="0"/>
+              <ma14:wrappingTextBoxFlag xmlns:ma14="http://schemas.microsoft.com/office/mac/drawingml/2011/main" xmlns="" val="0"/>
             </a:ext>
           </a:extLst>
         </p:spPr>
@@ -7803,7 +6646,7 @@
             <a:pPr algn="l"/>
             <a:fld id="{F7021451-1387-4CA6-816F-3879F97B5CBC}" type="slidenum">
               <a:rPr lang="en-US" b="0"/>
-              <a:t>5</a:t>
+              <a:t>4</a:t>
             </a:fld>
             <a:endParaRPr lang="en-US"/>
           </a:p>
@@ -7897,7 +6740,7 @@
 </p:sld>
 </file>
 
-<file path=ppt/slides/slide6.xml><?xml version="1.0" encoding="utf-8"?>
+<file path=ppt/slides/slide5.xml><?xml version="1.0" encoding="utf-8"?>
 <p:sld xmlns:a="http://schemas.openxmlformats.org/drawingml/2006/main" xmlns:r="http://schemas.openxmlformats.org/officeDocument/2006/relationships" xmlns:p="http://schemas.openxmlformats.org/presentationml/2006/main">
   <p:cSld name="Slide 7">
     <p:spTree>
@@ -8271,7 +7114,7 @@
           </a:prstGeom>
           <a:extLst>
             <a:ext uri="{C572A759-6A51-4108-AA02-DFA0A04FC94B}">
-              <ma14:wrappingTextBoxFlag xmlns="" xmlns:ma14="http://schemas.microsoft.com/office/mac/drawingml/2011/main" val="0"/>
+              <ma14:wrappingTextBoxFlag xmlns:ma14="http://schemas.microsoft.com/office/mac/drawingml/2011/main" xmlns="" val="0"/>
             </a:ext>
           </a:extLst>
         </p:spPr>
@@ -8293,7 +7136,7 @@
             <a:pPr algn="l"/>
             <a:fld id="{F7021451-1387-4CA6-816F-3879F97B5CBC}" type="slidenum">
               <a:rPr lang="en-US" b="0"/>
-              <a:t>6</a:t>
+              <a:t>5</a:t>
             </a:fld>
             <a:endParaRPr lang="en-US"/>
           </a:p>
@@ -8395,7 +7238,7 @@
 </p:sld>
 </file>
 
-<file path=ppt/slides/slide7.xml><?xml version="1.0" encoding="utf-8"?>
+<file path=ppt/slides/slide6.xml><?xml version="1.0" encoding="utf-8"?>
 <p:sld xmlns:a="http://schemas.openxmlformats.org/drawingml/2006/main" xmlns:r="http://schemas.openxmlformats.org/officeDocument/2006/relationships" xmlns:p="http://schemas.openxmlformats.org/presentationml/2006/main">
   <p:cSld name="Slide 8">
     <p:spTree>
@@ -8612,87 +7455,6 @@
       </p:sp>
       <p:sp>
         <p:nvSpPr>
-          <p:cNvPr id="8" name="Text 4"/>
-          <p:cNvSpPr/>
-          <p:nvPr/>
-        </p:nvSpPr>
-        <p:spPr>
-          <a:xfrm>
-            <a:off x="6492240" y="4434840"/>
-            <a:ext cx="2743200" cy="274320"/>
-          </a:xfrm>
-          <a:prstGeom prst="rect">
-            <a:avLst/>
-          </a:prstGeom>
-          <a:noFill/>
-          <a:ln/>
-        </p:spPr>
-        <p:txBody>
-          <a:bodyPr wrap="square" lIns="0" tIns="0" rIns="0" bIns="0" rtlCol="0" anchor="ctr"/>
-          <a:lstStyle/>
-          <a:p>
-            <a:pPr marL="0" indent="0">
-              <a:buNone/>
-            </a:pPr>
-            <a:r>
-              <a:rPr lang="en-US" sz="2000" b="1" dirty="0">
-                <a:solidFill>
-                  <a:srgbClr val="102033"/>
-                </a:solidFill>
-              </a:rPr>
-              <a:t>Result interpretation</a:t>
-            </a:r>
-            <a:endParaRPr lang="en-US" sz="2000" dirty="0"/>
-          </a:p>
-        </p:txBody>
-      </p:sp>
-      <p:sp>
-        <p:nvSpPr>
-          <p:cNvPr id="9" name="Text 5"/>
-          <p:cNvSpPr/>
-          <p:nvPr/>
-        </p:nvSpPr>
-        <p:spPr>
-          <a:xfrm>
-            <a:off x="6492240" y="4809744"/>
-            <a:ext cx="4800600" cy="731520"/>
-          </a:xfrm>
-          <a:prstGeom prst="rect">
-            <a:avLst/>
-          </a:prstGeom>
-          <a:noFill/>
-          <a:ln/>
-        </p:spPr>
-        <p:txBody>
-          <a:bodyPr wrap="square" lIns="508" tIns="508" rIns="508" bIns="508" rtlCol="0" anchor="ctr">
-            <a:normAutofit fontScale="85000" lnSpcReduction="10000"/>
-          </a:bodyPr>
-          <a:lstStyle/>
-          <a:p>
-            <a:r>
-              <a:rPr lang="en-US" sz="1850" dirty="0">
-                <a:solidFill>
-                  <a:srgbClr val="102033"/>
-                </a:solidFill>
-              </a:rPr>
-              <a:t>Trip count went down, but Interval (II) went up. </a:t>
-            </a:r>
-          </a:p>
-          <a:p>
-            <a:r>
-              <a:rPr lang="en-US" sz="1850" dirty="0">
-                <a:solidFill>
-                  <a:srgbClr val="102033"/>
-                </a:solidFill>
-              </a:rPr>
-              <a:t>The design exposed more parallelism than the available memory/resource architecture could exploit.</a:t>
-            </a:r>
-            <a:endParaRPr lang="en-US" sz="1850" dirty="0"/>
-          </a:p>
-        </p:txBody>
-      </p:sp>
-      <p:sp>
-        <p:nvSpPr>
           <p:cNvPr id="25" name="Slide Number Placeholder 0"/>
           <p:cNvSpPr>
             <a:spLocks noGrp="1"/>
@@ -8711,7 +7473,7 @@
           </a:prstGeom>
           <a:extLst>
             <a:ext uri="{C572A759-6A51-4108-AA02-DFA0A04FC94B}">
-              <ma14:wrappingTextBoxFlag xmlns="" xmlns:ma14="http://schemas.microsoft.com/office/mac/drawingml/2011/main" val="0"/>
+              <ma14:wrappingTextBoxFlag xmlns:ma14="http://schemas.microsoft.com/office/mac/drawingml/2011/main" xmlns="" val="0"/>
             </a:ext>
           </a:extLst>
         </p:spPr>
@@ -8733,7 +7495,7 @@
             <a:pPr algn="l"/>
             <a:fld id="{F7021451-1387-4CA6-816F-3879F97B5CBC}" type="slidenum">
               <a:rPr lang="en-US" b="0"/>
-              <a:t>7</a:t>
+              <a:t>6</a:t>
             </a:fld>
             <a:endParaRPr lang="en-US"/>
           </a:p>
@@ -8814,6 +7576,77 @@
           </a:p>
         </p:txBody>
       </p:sp>
+      <p:sp>
+        <p:nvSpPr>
+          <p:cNvPr id="13" name="TextBox 12">
+            <a:extLst>
+              <a:ext uri="{FF2B5EF4-FFF2-40B4-BE49-F238E27FC236}">
+                <a16:creationId xmlns:a16="http://schemas.microsoft.com/office/drawing/2014/main" id="{81C3A00D-ABBE-05FA-A4F0-66A6EBE60377}"/>
+              </a:ext>
+            </a:extLst>
+          </p:cNvPr>
+          <p:cNvSpPr txBox="1"/>
+          <p:nvPr/>
+        </p:nvSpPr>
+        <p:spPr>
+          <a:xfrm>
+            <a:off x="7108257" y="4133088"/>
+            <a:ext cx="6097002" cy="2031325"/>
+          </a:xfrm>
+          <a:prstGeom prst="rect">
+            <a:avLst/>
+          </a:prstGeom>
+          <a:noFill/>
+        </p:spPr>
+        <p:txBody>
+          <a:bodyPr wrap="square">
+            <a:spAutoFit/>
+          </a:bodyPr>
+          <a:lstStyle/>
+          <a:p>
+            <a:r>
+              <a:rPr lang="en-GB" dirty="0"/>
+              <a:t>Factor    Latency    	Interval/II</a:t>
+            </a:r>
+          </a:p>
+          <a:p>
+            <a:r>
+              <a:rPr lang="en-GB" dirty="0"/>
+              <a:t>1         	370 ns     	1</a:t>
+            </a:r>
+          </a:p>
+          <a:p>
+            <a:r>
+              <a:rPr lang="en-GB" dirty="0"/>
+              <a:t>2         	210 ns     	1</a:t>
+            </a:r>
+          </a:p>
+          <a:p>
+            <a:r>
+              <a:rPr lang="en-GB" dirty="0"/>
+              <a:t>4         	220 ns    	2</a:t>
+            </a:r>
+          </a:p>
+          <a:p>
+            <a:r>
+              <a:rPr lang="en-GB" dirty="0"/>
+              <a:t>8         	220 ns     	4</a:t>
+            </a:r>
+          </a:p>
+          <a:p>
+            <a:r>
+              <a:rPr lang="en-GB" dirty="0"/>
+              <a:t>16        	220 ns     	8</a:t>
+            </a:r>
+          </a:p>
+          <a:p>
+            <a:r>
+              <a:rPr lang="en-GB" dirty="0"/>
+              <a:t>32        	220 ns     	n/a</a:t>
+            </a:r>
+          </a:p>
+        </p:txBody>
+      </p:sp>
     </p:spTree>
   </p:cSld>
   <p:clrMapOvr>
@@ -8822,7 +7655,7 @@
 </p:sld>
 </file>
 
-<file path=ppt/slides/slide8.xml><?xml version="1.0" encoding="utf-8"?>
+<file path=ppt/slides/slide7.xml><?xml version="1.0" encoding="utf-8"?>
 <p:sld xmlns:a="http://schemas.openxmlformats.org/drawingml/2006/main" xmlns:r="http://schemas.openxmlformats.org/officeDocument/2006/relationships" xmlns:p="http://schemas.openxmlformats.org/presentationml/2006/main">
   <p:cSld name="Slide 9">
     <p:spTree>
@@ -9097,7 +7930,7 @@
           </a:prstGeom>
           <a:extLst>
             <a:ext uri="{C572A759-6A51-4108-AA02-DFA0A04FC94B}">
-              <ma14:wrappingTextBoxFlag xmlns="" xmlns:ma14="http://schemas.microsoft.com/office/mac/drawingml/2011/main" val="0"/>
+              <ma14:wrappingTextBoxFlag xmlns:ma14="http://schemas.microsoft.com/office/mac/drawingml/2011/main" xmlns="" val="0"/>
             </a:ext>
           </a:extLst>
         </p:spPr>
@@ -9119,7 +7952,7 @@
             <a:pPr algn="l"/>
             <a:fld id="{F7021451-1387-4CA6-816F-3879F97B5CBC}" type="slidenum">
               <a:rPr lang="en-US" b="0"/>
-              <a:t>8</a:t>
+              <a:t>7</a:t>
             </a:fld>
             <a:endParaRPr lang="en-US"/>
           </a:p>
@@ -9208,7 +8041,7 @@
 </p:sld>
 </file>
 
-<file path=ppt/slides/slide9.xml><?xml version="1.0" encoding="utf-8"?>
+<file path=ppt/slides/slide8.xml><?xml version="1.0" encoding="utf-8"?>
 <p:sld xmlns:a="http://schemas.openxmlformats.org/drawingml/2006/main" xmlns:r="http://schemas.openxmlformats.org/officeDocument/2006/relationships" xmlns:p="http://schemas.openxmlformats.org/presentationml/2006/main">
   <p:cSld name="Slide 10">
     <p:spTree>
@@ -9660,7 +8493,481 @@
           </a:prstGeom>
           <a:extLst>
             <a:ext uri="{C572A759-6A51-4108-AA02-DFA0A04FC94B}">
-              <ma14:wrappingTextBoxFlag xmlns="" xmlns:ma14="http://schemas.microsoft.com/office/mac/drawingml/2011/main" val="0"/>
+              <ma14:wrappingTextBoxFlag xmlns:ma14="http://schemas.microsoft.com/office/mac/drawingml/2011/main" xmlns="" val="0"/>
+            </a:ext>
+          </a:extLst>
+        </p:spPr>
+        <p:txBody>
+          <a:bodyPr/>
+          <a:lstStyle>
+            <a:lvl1pPr>
+              <a:defRPr sz="900">
+                <a:solidFill>
+                  <a:srgbClr val="5B677A"/>
+                </a:solidFill>
+                <a:latin typeface="Aptos"/>
+                <a:ea typeface="Aptos"/>
+                <a:cs typeface="Aptos"/>
+              </a:defRPr>
+            </a:lvl1pPr>
+          </a:lstStyle>
+          <a:p>
+            <a:pPr algn="l"/>
+            <a:fld id="{F7021451-1387-4CA6-816F-3879F97B5CBC}" type="slidenum">
+              <a:rPr lang="en-US" b="0"/>
+              <a:t>8</a:t>
+            </a:fld>
+            <a:endParaRPr lang="en-US"/>
+          </a:p>
+        </p:txBody>
+      </p:sp>
+    </p:spTree>
+  </p:cSld>
+  <p:clrMapOvr>
+    <a:masterClrMapping/>
+  </p:clrMapOvr>
+</p:sld>
+</file>
+
+<file path=ppt/slides/slide9.xml><?xml version="1.0" encoding="utf-8"?>
+<p:sld xmlns:a="http://schemas.openxmlformats.org/drawingml/2006/main" xmlns:r="http://schemas.openxmlformats.org/officeDocument/2006/relationships" xmlns:p="http://schemas.openxmlformats.org/presentationml/2006/main">
+  <p:cSld name="Slide 11">
+    <p:spTree>
+      <p:nvGrpSpPr>
+        <p:cNvPr id="1" name=""/>
+        <p:cNvGrpSpPr/>
+        <p:nvPr/>
+      </p:nvGrpSpPr>
+      <p:grpSpPr>
+        <a:xfrm>
+          <a:off x="0" y="0"/>
+          <a:ext cx="0" cy="0"/>
+          <a:chOff x="0" y="0"/>
+          <a:chExt cx="0" cy="0"/>
+        </a:xfrm>
+      </p:grpSpPr>
+      <p:sp>
+        <p:nvSpPr>
+          <p:cNvPr id="2" name="Text 0"/>
+          <p:cNvSpPr/>
+          <p:nvPr/>
+        </p:nvSpPr>
+        <p:spPr>
+          <a:xfrm>
+            <a:off x="502920" y="320040"/>
+            <a:ext cx="11064240" cy="438912"/>
+          </a:xfrm>
+          <a:prstGeom prst="rect">
+            <a:avLst/>
+          </a:prstGeom>
+          <a:noFill/>
+          <a:ln/>
+        </p:spPr>
+        <p:txBody>
+          <a:bodyPr wrap="square" lIns="0" tIns="0" rIns="0" bIns="0" rtlCol="0" anchor="ctr"/>
+          <a:lstStyle/>
+          <a:p>
+            <a:pPr marL="0" indent="0">
+              <a:buNone/>
+            </a:pPr>
+            <a:r>
+              <a:rPr lang="en-US" sz="3400" b="1" dirty="0">
+                <a:solidFill>
+                  <a:srgbClr val="102033"/>
+                </a:solidFill>
+                <a:latin typeface="Aptos Display" pitchFamily="34" charset="0"/>
+                <a:ea typeface="Aptos Display" pitchFamily="34" charset="-122"/>
+                <a:cs typeface="Aptos Display" pitchFamily="34" charset="-120"/>
+              </a:rPr>
+              <a:t>RTL visualization: what unrolling becomes</a:t>
+            </a:r>
+            <a:endParaRPr lang="en-US" sz="3400" dirty="0"/>
+          </a:p>
+        </p:txBody>
+      </p:sp>
+      <p:sp>
+        <p:nvSpPr>
+          <p:cNvPr id="3" name="Text 1"/>
+          <p:cNvSpPr/>
+          <p:nvPr/>
+        </p:nvSpPr>
+        <p:spPr>
+          <a:xfrm>
+            <a:off x="530352" y="822960"/>
+            <a:ext cx="10424160" cy="256032"/>
+          </a:xfrm>
+          <a:prstGeom prst="rect">
+            <a:avLst/>
+          </a:prstGeom>
+          <a:noFill/>
+          <a:ln/>
+        </p:spPr>
+        <p:txBody>
+          <a:bodyPr wrap="square" lIns="0" tIns="0" rIns="0" bIns="0" rtlCol="0" anchor="ctr"/>
+          <a:lstStyle/>
+          <a:p>
+            <a:pPr marL="0" indent="0">
+              <a:buNone/>
+            </a:pPr>
+            <a:r>
+              <a:rPr lang="en-US" sz="1450" dirty="0">
+                <a:solidFill>
+                  <a:srgbClr val="5B677A"/>
+                </a:solidFill>
+              </a:rPr>
+              <a:t>Vivado schematics illustrate the structural growth.</a:t>
+            </a:r>
+            <a:endParaRPr lang="en-US" sz="1450" dirty="0"/>
+          </a:p>
+        </p:txBody>
+      </p:sp>
+      <p:pic>
+        <p:nvPicPr>
+          <p:cNvPr id="4" name="Image 0" descr="/mnt/data/vivado_rtl_schematic_rolled_single_multiplier_fsm.png"/>
+          <p:cNvPicPr>
+            <a:picLocks noChangeAspect="1"/>
+          </p:cNvPicPr>
+          <p:nvPr/>
+        </p:nvPicPr>
+        <p:blipFill>
+          <a:blip r:embed="rId3"/>
+          <a:stretch>
+            <a:fillRect/>
+          </a:stretch>
+        </p:blipFill>
+        <p:spPr>
+          <a:xfrm>
+            <a:off x="502920" y="1405993"/>
+            <a:ext cx="3611880" cy="1531413"/>
+          </a:xfrm>
+          <a:prstGeom prst="rect">
+            <a:avLst/>
+          </a:prstGeom>
+        </p:spPr>
+      </p:pic>
+      <p:pic>
+        <p:nvPicPr>
+          <p:cNvPr id="5" name="Image 1" descr="/mnt/data/vivado_rtl_schematic_unrolled_factor_4_adder_tree.png"/>
+          <p:cNvPicPr>
+            <a:picLocks noChangeAspect="1"/>
+          </p:cNvPicPr>
+          <p:nvPr/>
+        </p:nvPicPr>
+        <p:blipFill>
+          <a:blip r:embed="rId4"/>
+          <a:stretch>
+            <a:fillRect/>
+          </a:stretch>
+        </p:blipFill>
+        <p:spPr>
+          <a:xfrm>
+            <a:off x="4279392" y="1385263"/>
+            <a:ext cx="3566160" cy="1572874"/>
+          </a:xfrm>
+          <a:prstGeom prst="rect">
+            <a:avLst/>
+          </a:prstGeom>
+        </p:spPr>
+      </p:pic>
+      <p:pic>
+        <p:nvPicPr>
+          <p:cNvPr id="6" name="Image 2" descr="/mnt/data/vivado_rtl_schematic_unrolled_factor_8_adder_tree.png"/>
+          <p:cNvPicPr>
+            <a:picLocks noChangeAspect="1"/>
+          </p:cNvPicPr>
+          <p:nvPr/>
+        </p:nvPicPr>
+        <p:blipFill>
+          <a:blip r:embed="rId5"/>
+          <a:stretch>
+            <a:fillRect/>
+          </a:stretch>
+        </p:blipFill>
+        <p:spPr>
+          <a:xfrm>
+            <a:off x="8001000" y="1261860"/>
+            <a:ext cx="3611880" cy="1819679"/>
+          </a:xfrm>
+          <a:prstGeom prst="rect">
+            <a:avLst/>
+          </a:prstGeom>
+        </p:spPr>
+      </p:pic>
+      <p:sp>
+        <p:nvSpPr>
+          <p:cNvPr id="7" name="Text 2"/>
+          <p:cNvSpPr/>
+          <p:nvPr/>
+        </p:nvSpPr>
+        <p:spPr>
+          <a:xfrm>
+            <a:off x="502920" y="3383280"/>
+            <a:ext cx="3611880" cy="274320"/>
+          </a:xfrm>
+          <a:prstGeom prst="rect">
+            <a:avLst/>
+          </a:prstGeom>
+          <a:noFill/>
+          <a:ln/>
+        </p:spPr>
+        <p:txBody>
+          <a:bodyPr wrap="square" lIns="0" tIns="0" rIns="0" bIns="0" rtlCol="0" anchor="ctr"/>
+          <a:lstStyle/>
+          <a:p>
+            <a:pPr marL="0" indent="0" algn="ctr">
+              <a:buNone/>
+            </a:pPr>
+            <a:r>
+              <a:rPr lang="en-US" sz="2000" b="1" dirty="0">
+                <a:solidFill>
+                  <a:srgbClr val="102033"/>
+                </a:solidFill>
+              </a:rPr>
+              <a:t>Rolled</a:t>
+            </a:r>
+            <a:endParaRPr lang="en-US" sz="2000" dirty="0"/>
+          </a:p>
+        </p:txBody>
+      </p:sp>
+      <p:sp>
+        <p:nvSpPr>
+          <p:cNvPr id="8" name="Text 3"/>
+          <p:cNvSpPr/>
+          <p:nvPr/>
+        </p:nvSpPr>
+        <p:spPr>
+          <a:xfrm>
+            <a:off x="502920" y="3730752"/>
+            <a:ext cx="3611880" cy="274320"/>
+          </a:xfrm>
+          <a:prstGeom prst="rect">
+            <a:avLst/>
+          </a:prstGeom>
+          <a:noFill/>
+          <a:ln/>
+        </p:spPr>
+        <p:txBody>
+          <a:bodyPr wrap="square" lIns="0" tIns="0" rIns="0" bIns="0" rtlCol="0" anchor="ctr"/>
+          <a:lstStyle/>
+          <a:p>
+            <a:pPr marL="0" indent="0" algn="ctr">
+              <a:buNone/>
+            </a:pPr>
+            <a:r>
+              <a:rPr lang="en-US" sz="1600" dirty="0">
+                <a:solidFill>
+                  <a:srgbClr val="5B677A"/>
+                </a:solidFill>
+              </a:rPr>
+              <a:t>1 multiplier + FSM</a:t>
+            </a:r>
+            <a:endParaRPr lang="en-US" sz="1600" dirty="0"/>
+          </a:p>
+        </p:txBody>
+      </p:sp>
+      <p:sp>
+        <p:nvSpPr>
+          <p:cNvPr id="9" name="Text 4"/>
+          <p:cNvSpPr/>
+          <p:nvPr/>
+        </p:nvSpPr>
+        <p:spPr>
+          <a:xfrm>
+            <a:off x="4279392" y="3383280"/>
+            <a:ext cx="3566160" cy="274320"/>
+          </a:xfrm>
+          <a:prstGeom prst="rect">
+            <a:avLst/>
+          </a:prstGeom>
+          <a:noFill/>
+          <a:ln/>
+        </p:spPr>
+        <p:txBody>
+          <a:bodyPr wrap="square" lIns="0" tIns="0" rIns="0" bIns="0" rtlCol="0" anchor="ctr"/>
+          <a:lstStyle/>
+          <a:p>
+            <a:pPr marL="0" indent="0" algn="ctr">
+              <a:buNone/>
+            </a:pPr>
+            <a:r>
+              <a:rPr lang="en-US" sz="2000" b="1" dirty="0">
+                <a:solidFill>
+                  <a:srgbClr val="102033"/>
+                </a:solidFill>
+              </a:rPr>
+              <a:t>Unroll factor 4</a:t>
+            </a:r>
+            <a:endParaRPr lang="en-US" sz="2000" dirty="0"/>
+          </a:p>
+        </p:txBody>
+      </p:sp>
+      <p:sp>
+        <p:nvSpPr>
+          <p:cNvPr id="10" name="Text 5"/>
+          <p:cNvSpPr/>
+          <p:nvPr/>
+        </p:nvSpPr>
+        <p:spPr>
+          <a:xfrm>
+            <a:off x="4279392" y="3730752"/>
+            <a:ext cx="3566160" cy="274320"/>
+          </a:xfrm>
+          <a:prstGeom prst="rect">
+            <a:avLst/>
+          </a:prstGeom>
+          <a:noFill/>
+          <a:ln/>
+        </p:spPr>
+        <p:txBody>
+          <a:bodyPr wrap="square" lIns="0" tIns="0" rIns="0" bIns="0" rtlCol="0" anchor="ctr"/>
+          <a:lstStyle/>
+          <a:p>
+            <a:pPr marL="0" indent="0" algn="ctr">
+              <a:buNone/>
+            </a:pPr>
+            <a:r>
+              <a:rPr lang="en-US" sz="1600" dirty="0">
+                <a:solidFill>
+                  <a:srgbClr val="5B677A"/>
+                </a:solidFill>
+              </a:rPr>
+              <a:t>4 multipliers + adder tree</a:t>
+            </a:r>
+            <a:endParaRPr lang="en-US" sz="1600" dirty="0"/>
+          </a:p>
+        </p:txBody>
+      </p:sp>
+      <p:sp>
+        <p:nvSpPr>
+          <p:cNvPr id="11" name="Text 6"/>
+          <p:cNvSpPr/>
+          <p:nvPr/>
+        </p:nvSpPr>
+        <p:spPr>
+          <a:xfrm>
+            <a:off x="8001000" y="3383280"/>
+            <a:ext cx="3611880" cy="274320"/>
+          </a:xfrm>
+          <a:prstGeom prst="rect">
+            <a:avLst/>
+          </a:prstGeom>
+          <a:noFill/>
+          <a:ln/>
+        </p:spPr>
+        <p:txBody>
+          <a:bodyPr wrap="square" lIns="0" tIns="0" rIns="0" bIns="0" rtlCol="0" anchor="ctr"/>
+          <a:lstStyle/>
+          <a:p>
+            <a:pPr marL="0" indent="0" algn="ctr">
+              <a:buNone/>
+            </a:pPr>
+            <a:r>
+              <a:rPr lang="en-US" sz="2000" b="1" dirty="0">
+                <a:solidFill>
+                  <a:srgbClr val="102033"/>
+                </a:solidFill>
+              </a:rPr>
+              <a:t>Unroll factor 8</a:t>
+            </a:r>
+            <a:endParaRPr lang="en-US" sz="2000" dirty="0"/>
+          </a:p>
+        </p:txBody>
+      </p:sp>
+      <p:sp>
+        <p:nvSpPr>
+          <p:cNvPr id="12" name="Text 7"/>
+          <p:cNvSpPr/>
+          <p:nvPr/>
+        </p:nvSpPr>
+        <p:spPr>
+          <a:xfrm>
+            <a:off x="8001000" y="3730752"/>
+            <a:ext cx="3611880" cy="274320"/>
+          </a:xfrm>
+          <a:prstGeom prst="rect">
+            <a:avLst/>
+          </a:prstGeom>
+          <a:noFill/>
+          <a:ln/>
+        </p:spPr>
+        <p:txBody>
+          <a:bodyPr wrap="square" lIns="0" tIns="0" rIns="0" bIns="0" rtlCol="0" anchor="ctr"/>
+          <a:lstStyle/>
+          <a:p>
+            <a:pPr marL="0" indent="0" algn="ctr">
+              <a:buNone/>
+            </a:pPr>
+            <a:r>
+              <a:rPr lang="en-US" sz="1600" dirty="0">
+                <a:solidFill>
+                  <a:srgbClr val="5B677A"/>
+                </a:solidFill>
+              </a:rPr>
+              <a:t>8 multipliers + larger tree</a:t>
+            </a:r>
+            <a:endParaRPr lang="en-US" sz="1600" dirty="0"/>
+          </a:p>
+        </p:txBody>
+      </p:sp>
+      <p:sp>
+        <p:nvSpPr>
+          <p:cNvPr id="13" name="Text 8"/>
+          <p:cNvSpPr/>
+          <p:nvPr/>
+        </p:nvSpPr>
+        <p:spPr>
+          <a:xfrm>
+            <a:off x="914400" y="4800600"/>
+            <a:ext cx="10241280" cy="594360"/>
+          </a:xfrm>
+          <a:prstGeom prst="rect">
+            <a:avLst/>
+          </a:prstGeom>
+          <a:noFill/>
+          <a:ln/>
+        </p:spPr>
+        <p:txBody>
+          <a:bodyPr wrap="square" lIns="635" tIns="635" rIns="635" bIns="635" rtlCol="0" anchor="ctr">
+            <a:normAutofit lnSpcReduction="10000"/>
+          </a:bodyPr>
+          <a:lstStyle/>
+          <a:p>
+            <a:pPr marL="0" indent="0" algn="ctr">
+              <a:buNone/>
+            </a:pPr>
+            <a:r>
+              <a:rPr lang="en-US" sz="1950" dirty="0">
+                <a:solidFill>
+                  <a:srgbClr val="102033"/>
+                </a:solidFill>
+              </a:rPr>
+              <a:t>The rolled schematic looks more complex because of control, but it reuses less arithmetic hardware. The unrolled schematics look cleaner but duplicate hardware.</a:t>
+            </a:r>
+            <a:endParaRPr lang="en-US" sz="1950" dirty="0"/>
+          </a:p>
+        </p:txBody>
+      </p:sp>
+      <p:sp>
+        <p:nvSpPr>
+          <p:cNvPr id="25" name="Slide Number Placeholder 0"/>
+          <p:cNvSpPr>
+            <a:spLocks noGrp="1"/>
+          </p:cNvSpPr>
+          <p:nvPr>
+            <p:ph type="sldNum" sz="quarter" idx="4294967295"/>
+          </p:nvPr>
+        </p:nvSpPr>
+        <p:spPr>
+          <a:xfrm>
+            <a:off x="11384280" y="6565392"/>
+            <a:ext cx="800000" cy="300000"/>
+          </a:xfrm>
+          <a:prstGeom prst="rect">
+            <a:avLst/>
+          </a:prstGeom>
+          <a:extLst>
+            <a:ext uri="{C572A759-6A51-4108-AA02-DFA0A04FC94B}">
+              <ma14:wrappingTextBoxFlag xmlns:ma14="http://schemas.microsoft.com/office/mac/drawingml/2011/main" xmlns="" val="0"/>
             </a:ext>
           </a:extLst>
         </p:spPr>

--- a/presentation/loop_unrolling_presentation.pptx
+++ b/presentation/loop_unrolling_presentation.pptx
@@ -5,21 +5,22 @@
     <p:sldMasterId id="2147483648" r:id="rId1"/>
   </p:sldMasterIdLst>
   <p:notesMasterIdLst>
-    <p:notesMasterId r:id="rId14"/>
+    <p:notesMasterId r:id="rId15"/>
   </p:notesMasterIdLst>
   <p:sldIdLst>
     <p:sldId id="256" r:id="rId2"/>
     <p:sldId id="258" r:id="rId3"/>
     <p:sldId id="259" r:id="rId4"/>
-    <p:sldId id="261" r:id="rId5"/>
-    <p:sldId id="262" r:id="rId6"/>
-    <p:sldId id="263" r:id="rId7"/>
-    <p:sldId id="264" r:id="rId8"/>
-    <p:sldId id="265" r:id="rId9"/>
-    <p:sldId id="266" r:id="rId10"/>
-    <p:sldId id="267" r:id="rId11"/>
-    <p:sldId id="268" r:id="rId12"/>
-    <p:sldId id="269" r:id="rId13"/>
+    <p:sldId id="270" r:id="rId5"/>
+    <p:sldId id="261" r:id="rId6"/>
+    <p:sldId id="262" r:id="rId7"/>
+    <p:sldId id="263" r:id="rId8"/>
+    <p:sldId id="264" r:id="rId9"/>
+    <p:sldId id="265" r:id="rId10"/>
+    <p:sldId id="266" r:id="rId11"/>
+    <p:sldId id="267" r:id="rId12"/>
+    <p:sldId id="268" r:id="rId13"/>
+    <p:sldId id="269" r:id="rId14"/>
   </p:sldIdLst>
   <p:sldSz cx="12192000" cy="6858000"/>
   <p:notesSz cx="6858000" cy="12192000"/>
@@ -1732,7 +1733,7 @@
           <a:p>
             <a:fld id="{F7021451-1387-4CA6-816F-3879F97B5CBC}" type="slidenum">
               <a:rPr lang="en-US"/>
-              <a:t>10</a:t>
+              <a:t>11</a:t>
             </a:fld>
             <a:endParaRPr lang="en-US"/>
           </a:p>
@@ -1819,7 +1820,7 @@
           <a:p>
             <a:fld id="{F7021451-1387-4CA6-816F-3879F97B5CBC}" type="slidenum">
               <a:rPr lang="en-US"/>
-              <a:t>11</a:t>
+              <a:t>12</a:t>
             </a:fld>
             <a:endParaRPr lang="en-US"/>
           </a:p>
@@ -1906,7 +1907,7 @@
           <a:p>
             <a:fld id="{F7021451-1387-4CA6-816F-3879F97B5CBC}" type="slidenum">
               <a:rPr lang="en-US"/>
-              <a:t>12</a:t>
+              <a:t>13</a:t>
             </a:fld>
             <a:endParaRPr lang="en-US"/>
           </a:p>
@@ -2167,7 +2168,7 @@
           <a:p>
             <a:fld id="{F7021451-1387-4CA6-816F-3879F97B5CBC}" type="slidenum">
               <a:rPr lang="en-US"/>
-              <a:t>4</a:t>
+              <a:t>5</a:t>
             </a:fld>
             <a:endParaRPr lang="en-US"/>
           </a:p>
@@ -2254,7 +2255,7 @@
           <a:p>
             <a:fld id="{F7021451-1387-4CA6-816F-3879F97B5CBC}" type="slidenum">
               <a:rPr lang="en-US"/>
-              <a:t>5</a:t>
+              <a:t>6</a:t>
             </a:fld>
             <a:endParaRPr lang="en-US"/>
           </a:p>
@@ -2341,7 +2342,7 @@
           <a:p>
             <a:fld id="{F7021451-1387-4CA6-816F-3879F97B5CBC}" type="slidenum">
               <a:rPr lang="en-US"/>
-              <a:t>6</a:t>
+              <a:t>7</a:t>
             </a:fld>
             <a:endParaRPr lang="en-US"/>
           </a:p>
@@ -2428,7 +2429,7 @@
           <a:p>
             <a:fld id="{F7021451-1387-4CA6-816F-3879F97B5CBC}" type="slidenum">
               <a:rPr lang="en-US"/>
-              <a:t>7</a:t>
+              <a:t>8</a:t>
             </a:fld>
             <a:endParaRPr lang="en-US"/>
           </a:p>
@@ -2515,7 +2516,7 @@
           <a:p>
             <a:fld id="{F7021451-1387-4CA6-816F-3879F97B5CBC}" type="slidenum">
               <a:rPr lang="en-US"/>
-              <a:t>8</a:t>
+              <a:t>9</a:t>
             </a:fld>
             <a:endParaRPr lang="en-US"/>
           </a:p>
@@ -2602,7 +2603,7 @@
           <a:p>
             <a:fld id="{F7021451-1387-4CA6-816F-3879F97B5CBC}" type="slidenum">
               <a:rPr lang="en-US"/>
-              <a:t>9</a:t>
+              <a:t>10</a:t>
             </a:fld>
             <a:endParaRPr lang="en-US"/>
           </a:p>
@@ -2765,7 +2766,7 @@
           </a:prstGeom>
           <a:extLst>
             <a:ext uri="{C572A759-6A51-4108-AA02-DFA0A04FC94B}">
-              <ma14:wrappingTextBoxFlag xmlns:ma14="http://schemas.microsoft.com/office/mac/drawingml/2011/main" xmlns="" val="0"/>
+              <ma14:wrappingTextBoxFlag xmlns="" xmlns:ma14="http://schemas.microsoft.com/office/mac/drawingml/2011/main" val="0"/>
             </a:ext>
           </a:extLst>
         </p:spPr>
@@ -2843,7 +2844,7 @@
           </a:prstGeom>
           <a:extLst>
             <a:ext uri="{C572A759-6A51-4108-AA02-DFA0A04FC94B}">
-              <ma14:wrappingTextBoxFlag xmlns:ma14="http://schemas.microsoft.com/office/mac/drawingml/2011/main" xmlns="" val="0"/>
+              <ma14:wrappingTextBoxFlag xmlns="" xmlns:ma14="http://schemas.microsoft.com/office/mac/drawingml/2011/main" val="0"/>
             </a:ext>
           </a:extLst>
         </p:spPr>
@@ -3610,7 +3611,7 @@
           </a:prstGeom>
           <a:extLst>
             <a:ext uri="{C572A759-6A51-4108-AA02-DFA0A04FC94B}">
-              <ma14:wrappingTextBoxFlag xmlns:ma14="http://schemas.microsoft.com/office/mac/drawingml/2011/main" xmlns="" val="0"/>
+              <ma14:wrappingTextBoxFlag xmlns="" xmlns:ma14="http://schemas.microsoft.com/office/mac/drawingml/2011/main" val="0"/>
             </a:ext>
           </a:extLst>
         </p:spPr>
@@ -3676,6 +3677,480 @@
 </file>
 
 <file path=ppt/slides/slide10.xml><?xml version="1.0" encoding="utf-8"?>
+<p:sld xmlns:a="http://schemas.openxmlformats.org/drawingml/2006/main" xmlns:r="http://schemas.openxmlformats.org/officeDocument/2006/relationships" xmlns:p="http://schemas.openxmlformats.org/presentationml/2006/main">
+  <p:cSld name="Slide 11">
+    <p:spTree>
+      <p:nvGrpSpPr>
+        <p:cNvPr id="1" name=""/>
+        <p:cNvGrpSpPr/>
+        <p:nvPr/>
+      </p:nvGrpSpPr>
+      <p:grpSpPr>
+        <a:xfrm>
+          <a:off x="0" y="0"/>
+          <a:ext cx="0" cy="0"/>
+          <a:chOff x="0" y="0"/>
+          <a:chExt cx="0" cy="0"/>
+        </a:xfrm>
+      </p:grpSpPr>
+      <p:sp>
+        <p:nvSpPr>
+          <p:cNvPr id="2" name="Text 0"/>
+          <p:cNvSpPr/>
+          <p:nvPr/>
+        </p:nvSpPr>
+        <p:spPr>
+          <a:xfrm>
+            <a:off x="502920" y="320040"/>
+            <a:ext cx="11064240" cy="438912"/>
+          </a:xfrm>
+          <a:prstGeom prst="rect">
+            <a:avLst/>
+          </a:prstGeom>
+          <a:noFill/>
+          <a:ln/>
+        </p:spPr>
+        <p:txBody>
+          <a:bodyPr wrap="square" lIns="0" tIns="0" rIns="0" bIns="0" rtlCol="0" anchor="ctr"/>
+          <a:lstStyle/>
+          <a:p>
+            <a:pPr marL="0" indent="0">
+              <a:buNone/>
+            </a:pPr>
+            <a:r>
+              <a:rPr lang="en-US" sz="3400" b="1" dirty="0">
+                <a:solidFill>
+                  <a:srgbClr val="102033"/>
+                </a:solidFill>
+                <a:latin typeface="Aptos Display" pitchFamily="34" charset="0"/>
+                <a:ea typeface="Aptos Display" pitchFamily="34" charset="-122"/>
+                <a:cs typeface="Aptos Display" pitchFamily="34" charset="-120"/>
+              </a:rPr>
+              <a:t>RTL visualization: what unrolling becomes</a:t>
+            </a:r>
+            <a:endParaRPr lang="en-US" sz="3400" dirty="0"/>
+          </a:p>
+        </p:txBody>
+      </p:sp>
+      <p:sp>
+        <p:nvSpPr>
+          <p:cNvPr id="3" name="Text 1"/>
+          <p:cNvSpPr/>
+          <p:nvPr/>
+        </p:nvSpPr>
+        <p:spPr>
+          <a:xfrm>
+            <a:off x="530352" y="822960"/>
+            <a:ext cx="10424160" cy="256032"/>
+          </a:xfrm>
+          <a:prstGeom prst="rect">
+            <a:avLst/>
+          </a:prstGeom>
+          <a:noFill/>
+          <a:ln/>
+        </p:spPr>
+        <p:txBody>
+          <a:bodyPr wrap="square" lIns="0" tIns="0" rIns="0" bIns="0" rtlCol="0" anchor="ctr"/>
+          <a:lstStyle/>
+          <a:p>
+            <a:pPr marL="0" indent="0">
+              <a:buNone/>
+            </a:pPr>
+            <a:r>
+              <a:rPr lang="en-US" sz="1450" dirty="0">
+                <a:solidFill>
+                  <a:srgbClr val="5B677A"/>
+                </a:solidFill>
+              </a:rPr>
+              <a:t>Vivado schematics illustrate the structural growth.</a:t>
+            </a:r>
+            <a:endParaRPr lang="en-US" sz="1450" dirty="0"/>
+          </a:p>
+        </p:txBody>
+      </p:sp>
+      <p:pic>
+        <p:nvPicPr>
+          <p:cNvPr id="4" name="Image 0" descr="/mnt/data/vivado_rtl_schematic_rolled_single_multiplier_fsm.png"/>
+          <p:cNvPicPr>
+            <a:picLocks noChangeAspect="1"/>
+          </p:cNvPicPr>
+          <p:nvPr/>
+        </p:nvPicPr>
+        <p:blipFill>
+          <a:blip r:embed="rId3"/>
+          <a:stretch>
+            <a:fillRect/>
+          </a:stretch>
+        </p:blipFill>
+        <p:spPr>
+          <a:xfrm>
+            <a:off x="502920" y="1405993"/>
+            <a:ext cx="3611880" cy="1531413"/>
+          </a:xfrm>
+          <a:prstGeom prst="rect">
+            <a:avLst/>
+          </a:prstGeom>
+        </p:spPr>
+      </p:pic>
+      <p:pic>
+        <p:nvPicPr>
+          <p:cNvPr id="5" name="Image 1" descr="/mnt/data/vivado_rtl_schematic_unrolled_factor_4_adder_tree.png"/>
+          <p:cNvPicPr>
+            <a:picLocks noChangeAspect="1"/>
+          </p:cNvPicPr>
+          <p:nvPr/>
+        </p:nvPicPr>
+        <p:blipFill>
+          <a:blip r:embed="rId4"/>
+          <a:stretch>
+            <a:fillRect/>
+          </a:stretch>
+        </p:blipFill>
+        <p:spPr>
+          <a:xfrm>
+            <a:off x="4279392" y="1385263"/>
+            <a:ext cx="3566160" cy="1572874"/>
+          </a:xfrm>
+          <a:prstGeom prst="rect">
+            <a:avLst/>
+          </a:prstGeom>
+        </p:spPr>
+      </p:pic>
+      <p:pic>
+        <p:nvPicPr>
+          <p:cNvPr id="6" name="Image 2" descr="/mnt/data/vivado_rtl_schematic_unrolled_factor_8_adder_tree.png"/>
+          <p:cNvPicPr>
+            <a:picLocks noChangeAspect="1"/>
+          </p:cNvPicPr>
+          <p:nvPr/>
+        </p:nvPicPr>
+        <p:blipFill>
+          <a:blip r:embed="rId5"/>
+          <a:stretch>
+            <a:fillRect/>
+          </a:stretch>
+        </p:blipFill>
+        <p:spPr>
+          <a:xfrm>
+            <a:off x="8001000" y="1261860"/>
+            <a:ext cx="3611880" cy="1819679"/>
+          </a:xfrm>
+          <a:prstGeom prst="rect">
+            <a:avLst/>
+          </a:prstGeom>
+        </p:spPr>
+      </p:pic>
+      <p:sp>
+        <p:nvSpPr>
+          <p:cNvPr id="7" name="Text 2"/>
+          <p:cNvSpPr/>
+          <p:nvPr/>
+        </p:nvSpPr>
+        <p:spPr>
+          <a:xfrm>
+            <a:off x="502920" y="3383280"/>
+            <a:ext cx="3611880" cy="274320"/>
+          </a:xfrm>
+          <a:prstGeom prst="rect">
+            <a:avLst/>
+          </a:prstGeom>
+          <a:noFill/>
+          <a:ln/>
+        </p:spPr>
+        <p:txBody>
+          <a:bodyPr wrap="square" lIns="0" tIns="0" rIns="0" bIns="0" rtlCol="0" anchor="ctr"/>
+          <a:lstStyle/>
+          <a:p>
+            <a:pPr marL="0" indent="0" algn="ctr">
+              <a:buNone/>
+            </a:pPr>
+            <a:r>
+              <a:rPr lang="en-US" sz="2000" b="1" dirty="0">
+                <a:solidFill>
+                  <a:srgbClr val="102033"/>
+                </a:solidFill>
+              </a:rPr>
+              <a:t>Rolled</a:t>
+            </a:r>
+            <a:endParaRPr lang="en-US" sz="2000" dirty="0"/>
+          </a:p>
+        </p:txBody>
+      </p:sp>
+      <p:sp>
+        <p:nvSpPr>
+          <p:cNvPr id="8" name="Text 3"/>
+          <p:cNvSpPr/>
+          <p:nvPr/>
+        </p:nvSpPr>
+        <p:spPr>
+          <a:xfrm>
+            <a:off x="502920" y="3730752"/>
+            <a:ext cx="3611880" cy="274320"/>
+          </a:xfrm>
+          <a:prstGeom prst="rect">
+            <a:avLst/>
+          </a:prstGeom>
+          <a:noFill/>
+          <a:ln/>
+        </p:spPr>
+        <p:txBody>
+          <a:bodyPr wrap="square" lIns="0" tIns="0" rIns="0" bIns="0" rtlCol="0" anchor="ctr"/>
+          <a:lstStyle/>
+          <a:p>
+            <a:pPr marL="0" indent="0" algn="ctr">
+              <a:buNone/>
+            </a:pPr>
+            <a:r>
+              <a:rPr lang="en-US" sz="1600" dirty="0">
+                <a:solidFill>
+                  <a:srgbClr val="5B677A"/>
+                </a:solidFill>
+              </a:rPr>
+              <a:t>1 multiplier + FSM</a:t>
+            </a:r>
+            <a:endParaRPr lang="en-US" sz="1600" dirty="0"/>
+          </a:p>
+        </p:txBody>
+      </p:sp>
+      <p:sp>
+        <p:nvSpPr>
+          <p:cNvPr id="9" name="Text 4"/>
+          <p:cNvSpPr/>
+          <p:nvPr/>
+        </p:nvSpPr>
+        <p:spPr>
+          <a:xfrm>
+            <a:off x="4279392" y="3383280"/>
+            <a:ext cx="3566160" cy="274320"/>
+          </a:xfrm>
+          <a:prstGeom prst="rect">
+            <a:avLst/>
+          </a:prstGeom>
+          <a:noFill/>
+          <a:ln/>
+        </p:spPr>
+        <p:txBody>
+          <a:bodyPr wrap="square" lIns="0" tIns="0" rIns="0" bIns="0" rtlCol="0" anchor="ctr"/>
+          <a:lstStyle/>
+          <a:p>
+            <a:pPr marL="0" indent="0" algn="ctr">
+              <a:buNone/>
+            </a:pPr>
+            <a:r>
+              <a:rPr lang="en-US" sz="2000" b="1" dirty="0">
+                <a:solidFill>
+                  <a:srgbClr val="102033"/>
+                </a:solidFill>
+              </a:rPr>
+              <a:t>Unroll factor 4</a:t>
+            </a:r>
+            <a:endParaRPr lang="en-US" sz="2000" dirty="0"/>
+          </a:p>
+        </p:txBody>
+      </p:sp>
+      <p:sp>
+        <p:nvSpPr>
+          <p:cNvPr id="10" name="Text 5"/>
+          <p:cNvSpPr/>
+          <p:nvPr/>
+        </p:nvSpPr>
+        <p:spPr>
+          <a:xfrm>
+            <a:off x="4279392" y="3730752"/>
+            <a:ext cx="3566160" cy="274320"/>
+          </a:xfrm>
+          <a:prstGeom prst="rect">
+            <a:avLst/>
+          </a:prstGeom>
+          <a:noFill/>
+          <a:ln/>
+        </p:spPr>
+        <p:txBody>
+          <a:bodyPr wrap="square" lIns="0" tIns="0" rIns="0" bIns="0" rtlCol="0" anchor="ctr"/>
+          <a:lstStyle/>
+          <a:p>
+            <a:pPr marL="0" indent="0" algn="ctr">
+              <a:buNone/>
+            </a:pPr>
+            <a:r>
+              <a:rPr lang="en-US" sz="1600" dirty="0">
+                <a:solidFill>
+                  <a:srgbClr val="5B677A"/>
+                </a:solidFill>
+              </a:rPr>
+              <a:t>4 multipliers + adder tree</a:t>
+            </a:r>
+            <a:endParaRPr lang="en-US" sz="1600" dirty="0"/>
+          </a:p>
+        </p:txBody>
+      </p:sp>
+      <p:sp>
+        <p:nvSpPr>
+          <p:cNvPr id="11" name="Text 6"/>
+          <p:cNvSpPr/>
+          <p:nvPr/>
+        </p:nvSpPr>
+        <p:spPr>
+          <a:xfrm>
+            <a:off x="8001000" y="3383280"/>
+            <a:ext cx="3611880" cy="274320"/>
+          </a:xfrm>
+          <a:prstGeom prst="rect">
+            <a:avLst/>
+          </a:prstGeom>
+          <a:noFill/>
+          <a:ln/>
+        </p:spPr>
+        <p:txBody>
+          <a:bodyPr wrap="square" lIns="0" tIns="0" rIns="0" bIns="0" rtlCol="0" anchor="ctr"/>
+          <a:lstStyle/>
+          <a:p>
+            <a:pPr marL="0" indent="0" algn="ctr">
+              <a:buNone/>
+            </a:pPr>
+            <a:r>
+              <a:rPr lang="en-US" sz="2000" b="1" dirty="0">
+                <a:solidFill>
+                  <a:srgbClr val="102033"/>
+                </a:solidFill>
+              </a:rPr>
+              <a:t>Unroll factor 8</a:t>
+            </a:r>
+            <a:endParaRPr lang="en-US" sz="2000" dirty="0"/>
+          </a:p>
+        </p:txBody>
+      </p:sp>
+      <p:sp>
+        <p:nvSpPr>
+          <p:cNvPr id="12" name="Text 7"/>
+          <p:cNvSpPr/>
+          <p:nvPr/>
+        </p:nvSpPr>
+        <p:spPr>
+          <a:xfrm>
+            <a:off x="8001000" y="3730752"/>
+            <a:ext cx="3611880" cy="274320"/>
+          </a:xfrm>
+          <a:prstGeom prst="rect">
+            <a:avLst/>
+          </a:prstGeom>
+          <a:noFill/>
+          <a:ln/>
+        </p:spPr>
+        <p:txBody>
+          <a:bodyPr wrap="square" lIns="0" tIns="0" rIns="0" bIns="0" rtlCol="0" anchor="ctr"/>
+          <a:lstStyle/>
+          <a:p>
+            <a:pPr marL="0" indent="0" algn="ctr">
+              <a:buNone/>
+            </a:pPr>
+            <a:r>
+              <a:rPr lang="en-US" sz="1600" dirty="0">
+                <a:solidFill>
+                  <a:srgbClr val="5B677A"/>
+                </a:solidFill>
+              </a:rPr>
+              <a:t>8 multipliers + larger tree</a:t>
+            </a:r>
+            <a:endParaRPr lang="en-US" sz="1600" dirty="0"/>
+          </a:p>
+        </p:txBody>
+      </p:sp>
+      <p:sp>
+        <p:nvSpPr>
+          <p:cNvPr id="13" name="Text 8"/>
+          <p:cNvSpPr/>
+          <p:nvPr/>
+        </p:nvSpPr>
+        <p:spPr>
+          <a:xfrm>
+            <a:off x="914400" y="4800600"/>
+            <a:ext cx="10241280" cy="594360"/>
+          </a:xfrm>
+          <a:prstGeom prst="rect">
+            <a:avLst/>
+          </a:prstGeom>
+          <a:noFill/>
+          <a:ln/>
+        </p:spPr>
+        <p:txBody>
+          <a:bodyPr wrap="square" lIns="635" tIns="635" rIns="635" bIns="635" rtlCol="0" anchor="ctr">
+            <a:normAutofit lnSpcReduction="10000"/>
+          </a:bodyPr>
+          <a:lstStyle/>
+          <a:p>
+            <a:pPr marL="0" indent="0" algn="ctr">
+              <a:buNone/>
+            </a:pPr>
+            <a:r>
+              <a:rPr lang="en-US" sz="1950" dirty="0">
+                <a:solidFill>
+                  <a:srgbClr val="102033"/>
+                </a:solidFill>
+              </a:rPr>
+              <a:t>The rolled schematic looks more complex because of control, but it reuses less arithmetic hardware. The unrolled schematics look cleaner but duplicate hardware.</a:t>
+            </a:r>
+            <a:endParaRPr lang="en-US" sz="1950" dirty="0"/>
+          </a:p>
+        </p:txBody>
+      </p:sp>
+      <p:sp>
+        <p:nvSpPr>
+          <p:cNvPr id="25" name="Slide Number Placeholder 0"/>
+          <p:cNvSpPr>
+            <a:spLocks noGrp="1"/>
+          </p:cNvSpPr>
+          <p:nvPr>
+            <p:ph type="sldNum" sz="quarter" idx="4294967295"/>
+          </p:nvPr>
+        </p:nvSpPr>
+        <p:spPr>
+          <a:xfrm>
+            <a:off x="11384280" y="6565392"/>
+            <a:ext cx="800000" cy="300000"/>
+          </a:xfrm>
+          <a:prstGeom prst="rect">
+            <a:avLst/>
+          </a:prstGeom>
+          <a:extLst>
+            <a:ext uri="{C572A759-6A51-4108-AA02-DFA0A04FC94B}">
+              <ma14:wrappingTextBoxFlag xmlns="" xmlns:ma14="http://schemas.microsoft.com/office/mac/drawingml/2011/main" val="0"/>
+            </a:ext>
+          </a:extLst>
+        </p:spPr>
+        <p:txBody>
+          <a:bodyPr/>
+          <a:lstStyle>
+            <a:lvl1pPr>
+              <a:defRPr sz="900">
+                <a:solidFill>
+                  <a:srgbClr val="5B677A"/>
+                </a:solidFill>
+                <a:latin typeface="Aptos"/>
+                <a:ea typeface="Aptos"/>
+                <a:cs typeface="Aptos"/>
+              </a:defRPr>
+            </a:lvl1pPr>
+          </a:lstStyle>
+          <a:p>
+            <a:pPr algn="l"/>
+            <a:fld id="{F7021451-1387-4CA6-816F-3879F97B5CBC}" type="slidenum">
+              <a:rPr lang="en-US" b="0"/>
+              <a:t>10</a:t>
+            </a:fld>
+            <a:endParaRPr lang="en-US"/>
+          </a:p>
+        </p:txBody>
+      </p:sp>
+    </p:spTree>
+  </p:cSld>
+  <p:clrMapOvr>
+    <a:masterClrMapping/>
+  </p:clrMapOvr>
+</p:sld>
+</file>
+
+<file path=ppt/slides/slide11.xml><?xml version="1.0" encoding="utf-8"?>
 <p:sld xmlns:a="http://schemas.openxmlformats.org/drawingml/2006/main" xmlns:r="http://schemas.openxmlformats.org/officeDocument/2006/relationships" xmlns:p="http://schemas.openxmlformats.org/presentationml/2006/main">
   <p:cSld name="Slide 12">
     <p:spTree>
@@ -4055,7 +4530,7 @@
           </a:prstGeom>
           <a:extLst>
             <a:ext uri="{C572A759-6A51-4108-AA02-DFA0A04FC94B}">
-              <ma14:wrappingTextBoxFlag xmlns:ma14="http://schemas.microsoft.com/office/mac/drawingml/2011/main" xmlns="" val="0"/>
+              <ma14:wrappingTextBoxFlag xmlns="" xmlns:ma14="http://schemas.microsoft.com/office/mac/drawingml/2011/main" val="0"/>
             </a:ext>
           </a:extLst>
         </p:spPr>
@@ -4077,7 +4552,7 @@
             <a:pPr algn="l"/>
             <a:fld id="{F7021451-1387-4CA6-816F-3879F97B5CBC}" type="slidenum">
               <a:rPr lang="en-US" b="0"/>
-              <a:t>10</a:t>
+              <a:t>11</a:t>
             </a:fld>
             <a:endParaRPr lang="en-US"/>
           </a:p>
@@ -4091,7 +4566,7 @@
 </p:sld>
 </file>
 
-<file path=ppt/slides/slide11.xml><?xml version="1.0" encoding="utf-8"?>
+<file path=ppt/slides/slide12.xml><?xml version="1.0" encoding="utf-8"?>
 <p:sld xmlns:a="http://schemas.openxmlformats.org/drawingml/2006/main" xmlns:r="http://schemas.openxmlformats.org/officeDocument/2006/relationships" xmlns:p="http://schemas.openxmlformats.org/presentationml/2006/main">
   <p:cSld name="Slide 13">
     <p:spTree>
@@ -4629,7 +5104,7 @@
           </a:prstGeom>
           <a:extLst>
             <a:ext uri="{C572A759-6A51-4108-AA02-DFA0A04FC94B}">
-              <ma14:wrappingTextBoxFlag xmlns:ma14="http://schemas.microsoft.com/office/mac/drawingml/2011/main" xmlns="" val="0"/>
+              <ma14:wrappingTextBoxFlag xmlns="" xmlns:ma14="http://schemas.microsoft.com/office/mac/drawingml/2011/main" val="0"/>
             </a:ext>
           </a:extLst>
         </p:spPr>
@@ -4651,7 +5126,7 @@
             <a:pPr algn="l"/>
             <a:fld id="{F7021451-1387-4CA6-816F-3879F97B5CBC}" type="slidenum">
               <a:rPr lang="en-US" b="0"/>
-              <a:t>11</a:t>
+              <a:t>12</a:t>
             </a:fld>
             <a:endParaRPr lang="en-US"/>
           </a:p>
@@ -4665,7 +5140,7 @@
 </p:sld>
 </file>
 
-<file path=ppt/slides/slide12.xml><?xml version="1.0" encoding="utf-8"?>
+<file path=ppt/slides/slide13.xml><?xml version="1.0" encoding="utf-8"?>
 <p:sld xmlns:a="http://schemas.openxmlformats.org/drawingml/2006/main" xmlns:r="http://schemas.openxmlformats.org/officeDocument/2006/relationships" xmlns:p="http://schemas.openxmlformats.org/presentationml/2006/main">
   <p:cSld name="Slide 14">
     <p:spTree>
@@ -4878,7 +5353,7 @@
           </a:prstGeom>
           <a:extLst>
             <a:ext uri="{C572A759-6A51-4108-AA02-DFA0A04FC94B}">
-              <ma14:wrappingTextBoxFlag xmlns:ma14="http://schemas.microsoft.com/office/mac/drawingml/2011/main" xmlns="" val="0"/>
+              <ma14:wrappingTextBoxFlag xmlns="" xmlns:ma14="http://schemas.microsoft.com/office/mac/drawingml/2011/main" val="0"/>
             </a:ext>
           </a:extLst>
         </p:spPr>
@@ -4900,7 +5375,7 @@
             <a:pPr algn="l"/>
             <a:fld id="{F7021451-1387-4CA6-816F-3879F97B5CBC}" type="slidenum">
               <a:rPr lang="en-US" b="0"/>
-              <a:t>12</a:t>
+              <a:t>13</a:t>
             </a:fld>
             <a:endParaRPr lang="en-US"/>
           </a:p>
@@ -5474,7 +5949,7 @@
           </a:prstGeom>
           <a:extLst>
             <a:ext uri="{C572A759-6A51-4108-AA02-DFA0A04FC94B}">
-              <ma14:wrappingTextBoxFlag xmlns:ma14="http://schemas.microsoft.com/office/mac/drawingml/2011/main" xmlns="" val="0"/>
+              <ma14:wrappingTextBoxFlag xmlns="" xmlns:ma14="http://schemas.microsoft.com/office/mac/drawingml/2011/main" val="0"/>
             </a:ext>
           </a:extLst>
         </p:spPr>
@@ -5998,7 +6473,7 @@
           </a:prstGeom>
           <a:extLst>
             <a:ext uri="{C572A759-6A51-4108-AA02-DFA0A04FC94B}">
-              <ma14:wrappingTextBoxFlag xmlns:ma14="http://schemas.microsoft.com/office/mac/drawingml/2011/main" xmlns="" val="0"/>
+              <ma14:wrappingTextBoxFlag xmlns="" xmlns:ma14="http://schemas.microsoft.com/office/mac/drawingml/2011/main" val="0"/>
             </a:ext>
           </a:extLst>
         </p:spPr>
@@ -6097,6 +6572,150 @@
 </file>
 
 <file path=ppt/slides/slide4.xml><?xml version="1.0" encoding="utf-8"?>
+<p:sld xmlns:a="http://schemas.openxmlformats.org/drawingml/2006/main" xmlns:r="http://schemas.openxmlformats.org/officeDocument/2006/relationships" xmlns:p="http://schemas.openxmlformats.org/presentationml/2006/main">
+  <p:cSld>
+    <p:spTree>
+      <p:nvGrpSpPr>
+        <p:cNvPr id="1" name=""/>
+        <p:cNvGrpSpPr/>
+        <p:nvPr/>
+      </p:nvGrpSpPr>
+      <p:grpSpPr>
+        <a:xfrm>
+          <a:off x="0" y="0"/>
+          <a:ext cx="0" cy="0"/>
+          <a:chOff x="0" y="0"/>
+          <a:chExt cx="0" cy="0"/>
+        </a:xfrm>
+      </p:grpSpPr>
+      <p:pic>
+        <p:nvPicPr>
+          <p:cNvPr id="2" name="Image 1" descr="/mnt/data/vivado_rtl_schematic_unrolled_factor_4_adder_tree.png">
+            <a:extLst>
+              <a:ext uri="{FF2B5EF4-FFF2-40B4-BE49-F238E27FC236}">
+                <a16:creationId xmlns:a16="http://schemas.microsoft.com/office/drawing/2014/main" id="{F60624DF-F95C-C7B4-6BD0-4BA12438EA5B}"/>
+              </a:ext>
+            </a:extLst>
+          </p:cNvPr>
+          <p:cNvPicPr>
+            <a:picLocks noChangeAspect="1"/>
+          </p:cNvPicPr>
+          <p:nvPr/>
+        </p:nvPicPr>
+        <p:blipFill>
+          <a:blip r:embed="rId2"/>
+          <a:stretch>
+            <a:fillRect/>
+          </a:stretch>
+        </p:blipFill>
+        <p:spPr>
+          <a:xfrm>
+            <a:off x="2292419" y="1751410"/>
+            <a:ext cx="7607161" cy="3355179"/>
+          </a:xfrm>
+          <a:prstGeom prst="rect">
+            <a:avLst/>
+          </a:prstGeom>
+        </p:spPr>
+      </p:pic>
+      <p:sp>
+        <p:nvSpPr>
+          <p:cNvPr id="3" name="Text 4">
+            <a:extLst>
+              <a:ext uri="{FF2B5EF4-FFF2-40B4-BE49-F238E27FC236}">
+                <a16:creationId xmlns:a16="http://schemas.microsoft.com/office/drawing/2014/main" id="{FE463C78-BAF1-619C-392E-A70940CD15A7}"/>
+              </a:ext>
+            </a:extLst>
+          </p:cNvPr>
+          <p:cNvSpPr/>
+          <p:nvPr/>
+        </p:nvSpPr>
+        <p:spPr>
+          <a:xfrm>
+            <a:off x="3400927" y="748895"/>
+            <a:ext cx="5075727" cy="585166"/>
+          </a:xfrm>
+          <a:prstGeom prst="rect">
+            <a:avLst/>
+          </a:prstGeom>
+          <a:noFill/>
+          <a:ln/>
+        </p:spPr>
+        <p:txBody>
+          <a:bodyPr wrap="square" lIns="0" tIns="0" rIns="0" bIns="0" rtlCol="0" anchor="ctr"/>
+          <a:lstStyle/>
+          <a:p>
+            <a:pPr marL="0" indent="0" algn="ctr">
+              <a:buNone/>
+            </a:pPr>
+            <a:r>
+              <a:rPr lang="en-US" sz="2000" b="1" dirty="0">
+                <a:solidFill>
+                  <a:srgbClr val="102033"/>
+                </a:solidFill>
+              </a:rPr>
+              <a:t>Unroll factor 4</a:t>
+            </a:r>
+            <a:endParaRPr lang="en-US" sz="2000" dirty="0"/>
+          </a:p>
+        </p:txBody>
+      </p:sp>
+      <p:sp>
+        <p:nvSpPr>
+          <p:cNvPr id="4" name="Text 5">
+            <a:extLst>
+              <a:ext uri="{FF2B5EF4-FFF2-40B4-BE49-F238E27FC236}">
+                <a16:creationId xmlns:a16="http://schemas.microsoft.com/office/drawing/2014/main" id="{1FA22FB8-221C-F478-1384-686C5D39A4AA}"/>
+              </a:ext>
+            </a:extLst>
+          </p:cNvPr>
+          <p:cNvSpPr/>
+          <p:nvPr/>
+        </p:nvSpPr>
+        <p:spPr>
+          <a:xfrm>
+            <a:off x="3400927" y="1096367"/>
+            <a:ext cx="5075727" cy="585166"/>
+          </a:xfrm>
+          <a:prstGeom prst="rect">
+            <a:avLst/>
+          </a:prstGeom>
+          <a:noFill/>
+          <a:ln/>
+        </p:spPr>
+        <p:txBody>
+          <a:bodyPr wrap="square" lIns="0" tIns="0" rIns="0" bIns="0" rtlCol="0" anchor="ctr"/>
+          <a:lstStyle/>
+          <a:p>
+            <a:pPr marL="0" indent="0" algn="ctr">
+              <a:buNone/>
+            </a:pPr>
+            <a:r>
+              <a:rPr lang="en-US" sz="1600" dirty="0">
+                <a:solidFill>
+                  <a:srgbClr val="5B677A"/>
+                </a:solidFill>
+              </a:rPr>
+              <a:t>4 multipliers + adder tree</a:t>
+            </a:r>
+            <a:endParaRPr lang="en-US" sz="1600" dirty="0"/>
+          </a:p>
+        </p:txBody>
+      </p:sp>
+    </p:spTree>
+    <p:extLst>
+      <p:ext uri="{BB962C8B-B14F-4D97-AF65-F5344CB8AC3E}">
+        <p14:creationId xmlns:p14="http://schemas.microsoft.com/office/powerpoint/2010/main" val="1421312862"/>
+      </p:ext>
+    </p:extLst>
+  </p:cSld>
+  <p:clrMapOvr>
+    <a:masterClrMapping/>
+  </p:clrMapOvr>
+</p:sld>
+</file>
+
+<file path=ppt/slides/slide5.xml><?xml version="1.0" encoding="utf-8"?>
 <p:sld xmlns:a="http://schemas.openxmlformats.org/drawingml/2006/main" xmlns:r="http://schemas.openxmlformats.org/officeDocument/2006/relationships" xmlns:p="http://schemas.openxmlformats.org/presentationml/2006/main">
   <p:cSld name="Slide 6">
     <p:spTree>
@@ -6624,7 +7243,7 @@
           </a:prstGeom>
           <a:extLst>
             <a:ext uri="{C572A759-6A51-4108-AA02-DFA0A04FC94B}">
-              <ma14:wrappingTextBoxFlag xmlns:ma14="http://schemas.microsoft.com/office/mac/drawingml/2011/main" xmlns="" val="0"/>
+              <ma14:wrappingTextBoxFlag xmlns="" xmlns:ma14="http://schemas.microsoft.com/office/mac/drawingml/2011/main" val="0"/>
             </a:ext>
           </a:extLst>
         </p:spPr>
@@ -6646,7 +7265,7 @@
             <a:pPr algn="l"/>
             <a:fld id="{F7021451-1387-4CA6-816F-3879F97B5CBC}" type="slidenum">
               <a:rPr lang="en-US" b="0"/>
-              <a:t>4</a:t>
+              <a:t>5</a:t>
             </a:fld>
             <a:endParaRPr lang="en-US"/>
           </a:p>
@@ -6740,7 +7359,7 @@
 </p:sld>
 </file>
 
-<file path=ppt/slides/slide5.xml><?xml version="1.0" encoding="utf-8"?>
+<file path=ppt/slides/slide6.xml><?xml version="1.0" encoding="utf-8"?>
 <p:sld xmlns:a="http://schemas.openxmlformats.org/drawingml/2006/main" xmlns:r="http://schemas.openxmlformats.org/officeDocument/2006/relationships" xmlns:p="http://schemas.openxmlformats.org/presentationml/2006/main">
   <p:cSld name="Slide 7">
     <p:spTree>
@@ -7114,7 +7733,7 @@
           </a:prstGeom>
           <a:extLst>
             <a:ext uri="{C572A759-6A51-4108-AA02-DFA0A04FC94B}">
-              <ma14:wrappingTextBoxFlag xmlns:ma14="http://schemas.microsoft.com/office/mac/drawingml/2011/main" xmlns="" val="0"/>
+              <ma14:wrappingTextBoxFlag xmlns="" xmlns:ma14="http://schemas.microsoft.com/office/mac/drawingml/2011/main" val="0"/>
             </a:ext>
           </a:extLst>
         </p:spPr>
@@ -7136,7 +7755,7 @@
             <a:pPr algn="l"/>
             <a:fld id="{F7021451-1387-4CA6-816F-3879F97B5CBC}" type="slidenum">
               <a:rPr lang="en-US" b="0"/>
-              <a:t>5</a:t>
+              <a:t>6</a:t>
             </a:fld>
             <a:endParaRPr lang="en-US"/>
           </a:p>
@@ -7238,7 +7857,7 @@
 </p:sld>
 </file>
 
-<file path=ppt/slides/slide6.xml><?xml version="1.0" encoding="utf-8"?>
+<file path=ppt/slides/slide7.xml><?xml version="1.0" encoding="utf-8"?>
 <p:sld xmlns:a="http://schemas.openxmlformats.org/drawingml/2006/main" xmlns:r="http://schemas.openxmlformats.org/officeDocument/2006/relationships" xmlns:p="http://schemas.openxmlformats.org/presentationml/2006/main">
   <p:cSld name="Slide 8">
     <p:spTree>
@@ -7473,7 +8092,7 @@
           </a:prstGeom>
           <a:extLst>
             <a:ext uri="{C572A759-6A51-4108-AA02-DFA0A04FC94B}">
-              <ma14:wrappingTextBoxFlag xmlns:ma14="http://schemas.microsoft.com/office/mac/drawingml/2011/main" xmlns="" val="0"/>
+              <ma14:wrappingTextBoxFlag xmlns="" xmlns:ma14="http://schemas.microsoft.com/office/mac/drawingml/2011/main" val="0"/>
             </a:ext>
           </a:extLst>
         </p:spPr>
@@ -7495,7 +8114,7 @@
             <a:pPr algn="l"/>
             <a:fld id="{F7021451-1387-4CA6-816F-3879F97B5CBC}" type="slidenum">
               <a:rPr lang="en-US" b="0"/>
-              <a:t>6</a:t>
+              <a:t>7</a:t>
             </a:fld>
             <a:endParaRPr lang="en-US"/>
           </a:p>
@@ -7655,7 +8274,7 @@
 </p:sld>
 </file>
 
-<file path=ppt/slides/slide7.xml><?xml version="1.0" encoding="utf-8"?>
+<file path=ppt/slides/slide8.xml><?xml version="1.0" encoding="utf-8"?>
 <p:sld xmlns:a="http://schemas.openxmlformats.org/drawingml/2006/main" xmlns:r="http://schemas.openxmlformats.org/officeDocument/2006/relationships" xmlns:p="http://schemas.openxmlformats.org/presentationml/2006/main">
   <p:cSld name="Slide 9">
     <p:spTree>
@@ -7930,7 +8549,7 @@
           </a:prstGeom>
           <a:extLst>
             <a:ext uri="{C572A759-6A51-4108-AA02-DFA0A04FC94B}">
-              <ma14:wrappingTextBoxFlag xmlns:ma14="http://schemas.microsoft.com/office/mac/drawingml/2011/main" xmlns="" val="0"/>
+              <ma14:wrappingTextBoxFlag xmlns="" xmlns:ma14="http://schemas.microsoft.com/office/mac/drawingml/2011/main" val="0"/>
             </a:ext>
           </a:extLst>
         </p:spPr>
@@ -7952,7 +8571,7 @@
             <a:pPr algn="l"/>
             <a:fld id="{F7021451-1387-4CA6-816F-3879F97B5CBC}" type="slidenum">
               <a:rPr lang="en-US" b="0"/>
-              <a:t>7</a:t>
+              <a:t>8</a:t>
             </a:fld>
             <a:endParaRPr lang="en-US"/>
           </a:p>
@@ -8041,7 +8660,7 @@
 </p:sld>
 </file>
 
-<file path=ppt/slides/slide8.xml><?xml version="1.0" encoding="utf-8"?>
+<file path=ppt/slides/slide9.xml><?xml version="1.0" encoding="utf-8"?>
 <p:sld xmlns:a="http://schemas.openxmlformats.org/drawingml/2006/main" xmlns:r="http://schemas.openxmlformats.org/officeDocument/2006/relationships" xmlns:p="http://schemas.openxmlformats.org/presentationml/2006/main">
   <p:cSld name="Slide 10">
     <p:spTree>
@@ -8493,481 +9112,7 @@
           </a:prstGeom>
           <a:extLst>
             <a:ext uri="{C572A759-6A51-4108-AA02-DFA0A04FC94B}">
-              <ma14:wrappingTextBoxFlag xmlns:ma14="http://schemas.microsoft.com/office/mac/drawingml/2011/main" xmlns="" val="0"/>
-            </a:ext>
-          </a:extLst>
-        </p:spPr>
-        <p:txBody>
-          <a:bodyPr/>
-          <a:lstStyle>
-            <a:lvl1pPr>
-              <a:defRPr sz="900">
-                <a:solidFill>
-                  <a:srgbClr val="5B677A"/>
-                </a:solidFill>
-                <a:latin typeface="Aptos"/>
-                <a:ea typeface="Aptos"/>
-                <a:cs typeface="Aptos"/>
-              </a:defRPr>
-            </a:lvl1pPr>
-          </a:lstStyle>
-          <a:p>
-            <a:pPr algn="l"/>
-            <a:fld id="{F7021451-1387-4CA6-816F-3879F97B5CBC}" type="slidenum">
-              <a:rPr lang="en-US" b="0"/>
-              <a:t>8</a:t>
-            </a:fld>
-            <a:endParaRPr lang="en-US"/>
-          </a:p>
-        </p:txBody>
-      </p:sp>
-    </p:spTree>
-  </p:cSld>
-  <p:clrMapOvr>
-    <a:masterClrMapping/>
-  </p:clrMapOvr>
-</p:sld>
-</file>
-
-<file path=ppt/slides/slide9.xml><?xml version="1.0" encoding="utf-8"?>
-<p:sld xmlns:a="http://schemas.openxmlformats.org/drawingml/2006/main" xmlns:r="http://schemas.openxmlformats.org/officeDocument/2006/relationships" xmlns:p="http://schemas.openxmlformats.org/presentationml/2006/main">
-  <p:cSld name="Slide 11">
-    <p:spTree>
-      <p:nvGrpSpPr>
-        <p:cNvPr id="1" name=""/>
-        <p:cNvGrpSpPr/>
-        <p:nvPr/>
-      </p:nvGrpSpPr>
-      <p:grpSpPr>
-        <a:xfrm>
-          <a:off x="0" y="0"/>
-          <a:ext cx="0" cy="0"/>
-          <a:chOff x="0" y="0"/>
-          <a:chExt cx="0" cy="0"/>
-        </a:xfrm>
-      </p:grpSpPr>
-      <p:sp>
-        <p:nvSpPr>
-          <p:cNvPr id="2" name="Text 0"/>
-          <p:cNvSpPr/>
-          <p:nvPr/>
-        </p:nvSpPr>
-        <p:spPr>
-          <a:xfrm>
-            <a:off x="502920" y="320040"/>
-            <a:ext cx="11064240" cy="438912"/>
-          </a:xfrm>
-          <a:prstGeom prst="rect">
-            <a:avLst/>
-          </a:prstGeom>
-          <a:noFill/>
-          <a:ln/>
-        </p:spPr>
-        <p:txBody>
-          <a:bodyPr wrap="square" lIns="0" tIns="0" rIns="0" bIns="0" rtlCol="0" anchor="ctr"/>
-          <a:lstStyle/>
-          <a:p>
-            <a:pPr marL="0" indent="0">
-              <a:buNone/>
-            </a:pPr>
-            <a:r>
-              <a:rPr lang="en-US" sz="3400" b="1" dirty="0">
-                <a:solidFill>
-                  <a:srgbClr val="102033"/>
-                </a:solidFill>
-                <a:latin typeface="Aptos Display" pitchFamily="34" charset="0"/>
-                <a:ea typeface="Aptos Display" pitchFamily="34" charset="-122"/>
-                <a:cs typeface="Aptos Display" pitchFamily="34" charset="-120"/>
-              </a:rPr>
-              <a:t>RTL visualization: what unrolling becomes</a:t>
-            </a:r>
-            <a:endParaRPr lang="en-US" sz="3400" dirty="0"/>
-          </a:p>
-        </p:txBody>
-      </p:sp>
-      <p:sp>
-        <p:nvSpPr>
-          <p:cNvPr id="3" name="Text 1"/>
-          <p:cNvSpPr/>
-          <p:nvPr/>
-        </p:nvSpPr>
-        <p:spPr>
-          <a:xfrm>
-            <a:off x="530352" y="822960"/>
-            <a:ext cx="10424160" cy="256032"/>
-          </a:xfrm>
-          <a:prstGeom prst="rect">
-            <a:avLst/>
-          </a:prstGeom>
-          <a:noFill/>
-          <a:ln/>
-        </p:spPr>
-        <p:txBody>
-          <a:bodyPr wrap="square" lIns="0" tIns="0" rIns="0" bIns="0" rtlCol="0" anchor="ctr"/>
-          <a:lstStyle/>
-          <a:p>
-            <a:pPr marL="0" indent="0">
-              <a:buNone/>
-            </a:pPr>
-            <a:r>
-              <a:rPr lang="en-US" sz="1450" dirty="0">
-                <a:solidFill>
-                  <a:srgbClr val="5B677A"/>
-                </a:solidFill>
-              </a:rPr>
-              <a:t>Vivado schematics illustrate the structural growth.</a:t>
-            </a:r>
-            <a:endParaRPr lang="en-US" sz="1450" dirty="0"/>
-          </a:p>
-        </p:txBody>
-      </p:sp>
-      <p:pic>
-        <p:nvPicPr>
-          <p:cNvPr id="4" name="Image 0" descr="/mnt/data/vivado_rtl_schematic_rolled_single_multiplier_fsm.png"/>
-          <p:cNvPicPr>
-            <a:picLocks noChangeAspect="1"/>
-          </p:cNvPicPr>
-          <p:nvPr/>
-        </p:nvPicPr>
-        <p:blipFill>
-          <a:blip r:embed="rId3"/>
-          <a:stretch>
-            <a:fillRect/>
-          </a:stretch>
-        </p:blipFill>
-        <p:spPr>
-          <a:xfrm>
-            <a:off x="502920" y="1405993"/>
-            <a:ext cx="3611880" cy="1531413"/>
-          </a:xfrm>
-          <a:prstGeom prst="rect">
-            <a:avLst/>
-          </a:prstGeom>
-        </p:spPr>
-      </p:pic>
-      <p:pic>
-        <p:nvPicPr>
-          <p:cNvPr id="5" name="Image 1" descr="/mnt/data/vivado_rtl_schematic_unrolled_factor_4_adder_tree.png"/>
-          <p:cNvPicPr>
-            <a:picLocks noChangeAspect="1"/>
-          </p:cNvPicPr>
-          <p:nvPr/>
-        </p:nvPicPr>
-        <p:blipFill>
-          <a:blip r:embed="rId4"/>
-          <a:stretch>
-            <a:fillRect/>
-          </a:stretch>
-        </p:blipFill>
-        <p:spPr>
-          <a:xfrm>
-            <a:off x="4279392" y="1385263"/>
-            <a:ext cx="3566160" cy="1572874"/>
-          </a:xfrm>
-          <a:prstGeom prst="rect">
-            <a:avLst/>
-          </a:prstGeom>
-        </p:spPr>
-      </p:pic>
-      <p:pic>
-        <p:nvPicPr>
-          <p:cNvPr id="6" name="Image 2" descr="/mnt/data/vivado_rtl_schematic_unrolled_factor_8_adder_tree.png"/>
-          <p:cNvPicPr>
-            <a:picLocks noChangeAspect="1"/>
-          </p:cNvPicPr>
-          <p:nvPr/>
-        </p:nvPicPr>
-        <p:blipFill>
-          <a:blip r:embed="rId5"/>
-          <a:stretch>
-            <a:fillRect/>
-          </a:stretch>
-        </p:blipFill>
-        <p:spPr>
-          <a:xfrm>
-            <a:off x="8001000" y="1261860"/>
-            <a:ext cx="3611880" cy="1819679"/>
-          </a:xfrm>
-          <a:prstGeom prst="rect">
-            <a:avLst/>
-          </a:prstGeom>
-        </p:spPr>
-      </p:pic>
-      <p:sp>
-        <p:nvSpPr>
-          <p:cNvPr id="7" name="Text 2"/>
-          <p:cNvSpPr/>
-          <p:nvPr/>
-        </p:nvSpPr>
-        <p:spPr>
-          <a:xfrm>
-            <a:off x="502920" y="3383280"/>
-            <a:ext cx="3611880" cy="274320"/>
-          </a:xfrm>
-          <a:prstGeom prst="rect">
-            <a:avLst/>
-          </a:prstGeom>
-          <a:noFill/>
-          <a:ln/>
-        </p:spPr>
-        <p:txBody>
-          <a:bodyPr wrap="square" lIns="0" tIns="0" rIns="0" bIns="0" rtlCol="0" anchor="ctr"/>
-          <a:lstStyle/>
-          <a:p>
-            <a:pPr marL="0" indent="0" algn="ctr">
-              <a:buNone/>
-            </a:pPr>
-            <a:r>
-              <a:rPr lang="en-US" sz="2000" b="1" dirty="0">
-                <a:solidFill>
-                  <a:srgbClr val="102033"/>
-                </a:solidFill>
-              </a:rPr>
-              <a:t>Rolled</a:t>
-            </a:r>
-            <a:endParaRPr lang="en-US" sz="2000" dirty="0"/>
-          </a:p>
-        </p:txBody>
-      </p:sp>
-      <p:sp>
-        <p:nvSpPr>
-          <p:cNvPr id="8" name="Text 3"/>
-          <p:cNvSpPr/>
-          <p:nvPr/>
-        </p:nvSpPr>
-        <p:spPr>
-          <a:xfrm>
-            <a:off x="502920" y="3730752"/>
-            <a:ext cx="3611880" cy="274320"/>
-          </a:xfrm>
-          <a:prstGeom prst="rect">
-            <a:avLst/>
-          </a:prstGeom>
-          <a:noFill/>
-          <a:ln/>
-        </p:spPr>
-        <p:txBody>
-          <a:bodyPr wrap="square" lIns="0" tIns="0" rIns="0" bIns="0" rtlCol="0" anchor="ctr"/>
-          <a:lstStyle/>
-          <a:p>
-            <a:pPr marL="0" indent="0" algn="ctr">
-              <a:buNone/>
-            </a:pPr>
-            <a:r>
-              <a:rPr lang="en-US" sz="1600" dirty="0">
-                <a:solidFill>
-                  <a:srgbClr val="5B677A"/>
-                </a:solidFill>
-              </a:rPr>
-              <a:t>1 multiplier + FSM</a:t>
-            </a:r>
-            <a:endParaRPr lang="en-US" sz="1600" dirty="0"/>
-          </a:p>
-        </p:txBody>
-      </p:sp>
-      <p:sp>
-        <p:nvSpPr>
-          <p:cNvPr id="9" name="Text 4"/>
-          <p:cNvSpPr/>
-          <p:nvPr/>
-        </p:nvSpPr>
-        <p:spPr>
-          <a:xfrm>
-            <a:off x="4279392" y="3383280"/>
-            <a:ext cx="3566160" cy="274320"/>
-          </a:xfrm>
-          <a:prstGeom prst="rect">
-            <a:avLst/>
-          </a:prstGeom>
-          <a:noFill/>
-          <a:ln/>
-        </p:spPr>
-        <p:txBody>
-          <a:bodyPr wrap="square" lIns="0" tIns="0" rIns="0" bIns="0" rtlCol="0" anchor="ctr"/>
-          <a:lstStyle/>
-          <a:p>
-            <a:pPr marL="0" indent="0" algn="ctr">
-              <a:buNone/>
-            </a:pPr>
-            <a:r>
-              <a:rPr lang="en-US" sz="2000" b="1" dirty="0">
-                <a:solidFill>
-                  <a:srgbClr val="102033"/>
-                </a:solidFill>
-              </a:rPr>
-              <a:t>Unroll factor 4</a:t>
-            </a:r>
-            <a:endParaRPr lang="en-US" sz="2000" dirty="0"/>
-          </a:p>
-        </p:txBody>
-      </p:sp>
-      <p:sp>
-        <p:nvSpPr>
-          <p:cNvPr id="10" name="Text 5"/>
-          <p:cNvSpPr/>
-          <p:nvPr/>
-        </p:nvSpPr>
-        <p:spPr>
-          <a:xfrm>
-            <a:off x="4279392" y="3730752"/>
-            <a:ext cx="3566160" cy="274320"/>
-          </a:xfrm>
-          <a:prstGeom prst="rect">
-            <a:avLst/>
-          </a:prstGeom>
-          <a:noFill/>
-          <a:ln/>
-        </p:spPr>
-        <p:txBody>
-          <a:bodyPr wrap="square" lIns="0" tIns="0" rIns="0" bIns="0" rtlCol="0" anchor="ctr"/>
-          <a:lstStyle/>
-          <a:p>
-            <a:pPr marL="0" indent="0" algn="ctr">
-              <a:buNone/>
-            </a:pPr>
-            <a:r>
-              <a:rPr lang="en-US" sz="1600" dirty="0">
-                <a:solidFill>
-                  <a:srgbClr val="5B677A"/>
-                </a:solidFill>
-              </a:rPr>
-              <a:t>4 multipliers + adder tree</a:t>
-            </a:r>
-            <a:endParaRPr lang="en-US" sz="1600" dirty="0"/>
-          </a:p>
-        </p:txBody>
-      </p:sp>
-      <p:sp>
-        <p:nvSpPr>
-          <p:cNvPr id="11" name="Text 6"/>
-          <p:cNvSpPr/>
-          <p:nvPr/>
-        </p:nvSpPr>
-        <p:spPr>
-          <a:xfrm>
-            <a:off x="8001000" y="3383280"/>
-            <a:ext cx="3611880" cy="274320"/>
-          </a:xfrm>
-          <a:prstGeom prst="rect">
-            <a:avLst/>
-          </a:prstGeom>
-          <a:noFill/>
-          <a:ln/>
-        </p:spPr>
-        <p:txBody>
-          <a:bodyPr wrap="square" lIns="0" tIns="0" rIns="0" bIns="0" rtlCol="0" anchor="ctr"/>
-          <a:lstStyle/>
-          <a:p>
-            <a:pPr marL="0" indent="0" algn="ctr">
-              <a:buNone/>
-            </a:pPr>
-            <a:r>
-              <a:rPr lang="en-US" sz="2000" b="1" dirty="0">
-                <a:solidFill>
-                  <a:srgbClr val="102033"/>
-                </a:solidFill>
-              </a:rPr>
-              <a:t>Unroll factor 8</a:t>
-            </a:r>
-            <a:endParaRPr lang="en-US" sz="2000" dirty="0"/>
-          </a:p>
-        </p:txBody>
-      </p:sp>
-      <p:sp>
-        <p:nvSpPr>
-          <p:cNvPr id="12" name="Text 7"/>
-          <p:cNvSpPr/>
-          <p:nvPr/>
-        </p:nvSpPr>
-        <p:spPr>
-          <a:xfrm>
-            <a:off x="8001000" y="3730752"/>
-            <a:ext cx="3611880" cy="274320"/>
-          </a:xfrm>
-          <a:prstGeom prst="rect">
-            <a:avLst/>
-          </a:prstGeom>
-          <a:noFill/>
-          <a:ln/>
-        </p:spPr>
-        <p:txBody>
-          <a:bodyPr wrap="square" lIns="0" tIns="0" rIns="0" bIns="0" rtlCol="0" anchor="ctr"/>
-          <a:lstStyle/>
-          <a:p>
-            <a:pPr marL="0" indent="0" algn="ctr">
-              <a:buNone/>
-            </a:pPr>
-            <a:r>
-              <a:rPr lang="en-US" sz="1600" dirty="0">
-                <a:solidFill>
-                  <a:srgbClr val="5B677A"/>
-                </a:solidFill>
-              </a:rPr>
-              <a:t>8 multipliers + larger tree</a:t>
-            </a:r>
-            <a:endParaRPr lang="en-US" sz="1600" dirty="0"/>
-          </a:p>
-        </p:txBody>
-      </p:sp>
-      <p:sp>
-        <p:nvSpPr>
-          <p:cNvPr id="13" name="Text 8"/>
-          <p:cNvSpPr/>
-          <p:nvPr/>
-        </p:nvSpPr>
-        <p:spPr>
-          <a:xfrm>
-            <a:off x="914400" y="4800600"/>
-            <a:ext cx="10241280" cy="594360"/>
-          </a:xfrm>
-          <a:prstGeom prst="rect">
-            <a:avLst/>
-          </a:prstGeom>
-          <a:noFill/>
-          <a:ln/>
-        </p:spPr>
-        <p:txBody>
-          <a:bodyPr wrap="square" lIns="635" tIns="635" rIns="635" bIns="635" rtlCol="0" anchor="ctr">
-            <a:normAutofit lnSpcReduction="10000"/>
-          </a:bodyPr>
-          <a:lstStyle/>
-          <a:p>
-            <a:pPr marL="0" indent="0" algn="ctr">
-              <a:buNone/>
-            </a:pPr>
-            <a:r>
-              <a:rPr lang="en-US" sz="1950" dirty="0">
-                <a:solidFill>
-                  <a:srgbClr val="102033"/>
-                </a:solidFill>
-              </a:rPr>
-              <a:t>The rolled schematic looks more complex because of control, but it reuses less arithmetic hardware. The unrolled schematics look cleaner but duplicate hardware.</a:t>
-            </a:r>
-            <a:endParaRPr lang="en-US" sz="1950" dirty="0"/>
-          </a:p>
-        </p:txBody>
-      </p:sp>
-      <p:sp>
-        <p:nvSpPr>
-          <p:cNvPr id="25" name="Slide Number Placeholder 0"/>
-          <p:cNvSpPr>
-            <a:spLocks noGrp="1"/>
-          </p:cNvSpPr>
-          <p:nvPr>
-            <p:ph type="sldNum" sz="quarter" idx="4294967295"/>
-          </p:nvPr>
-        </p:nvSpPr>
-        <p:spPr>
-          <a:xfrm>
-            <a:off x="11384280" y="6565392"/>
-            <a:ext cx="800000" cy="300000"/>
-          </a:xfrm>
-          <a:prstGeom prst="rect">
-            <a:avLst/>
-          </a:prstGeom>
-          <a:extLst>
-            <a:ext uri="{C572A759-6A51-4108-AA02-DFA0A04FC94B}">
-              <ma14:wrappingTextBoxFlag xmlns:ma14="http://schemas.microsoft.com/office/mac/drawingml/2011/main" xmlns="" val="0"/>
+              <ma14:wrappingTextBoxFlag xmlns="" xmlns:ma14="http://schemas.microsoft.com/office/mac/drawingml/2011/main" val="0"/>
             </a:ext>
           </a:extLst>
         </p:spPr>
